--- a/apps/about/public/briefings/high-level.pptx
+++ b/apps/about/public/briefings/high-level.pptx
@@ -2,23 +2,23 @@
 <file path=ppt/presentation.xml><?xml version="1.0" encoding="utf-8"?>
 <p:presentation xmlns:p="http://schemas.openxmlformats.org/presentationml/2006/main">
   <p:sldMasterIdLst>
-    <p:sldMasterId xmlns:r="http://schemas.openxmlformats.org/officeDocument/2006/relationships" id="2147483648" r:id="Rc589a31486da45bb"/>
+    <p:sldMasterId xmlns:r="http://schemas.openxmlformats.org/officeDocument/2006/relationships" id="2147483648" r:id="R409640eae0954471"/>
   </p:sldMasterIdLst>
   <p:notesMasterIdLst>
-    <p:notesMasterId xmlns:r="http://schemas.openxmlformats.org/officeDocument/2006/relationships" r:id="Rca5cd0858f2d4cc2"/>
+    <p:notesMasterId xmlns:r="http://schemas.openxmlformats.org/officeDocument/2006/relationships" r:id="Rffaa4912da04448a"/>
   </p:notesMasterIdLst>
   <p:sldIdLst>
-    <p:sldId xmlns:r="http://schemas.openxmlformats.org/officeDocument/2006/relationships" id="256" r:id="R9ca92cf6ce544ffd"/>
-    <p:sldId xmlns:r="http://schemas.openxmlformats.org/officeDocument/2006/relationships" id="257" r:id="Rb97a6f120ab84115"/>
-    <p:sldId xmlns:r="http://schemas.openxmlformats.org/officeDocument/2006/relationships" id="258" r:id="Rc3b257fab26348d4"/>
-    <p:sldId xmlns:r="http://schemas.openxmlformats.org/officeDocument/2006/relationships" id="259" r:id="R9e9ef928a45c4687"/>
-    <p:sldId xmlns:r="http://schemas.openxmlformats.org/officeDocument/2006/relationships" id="260" r:id="Rb38488c25b204d80"/>
-    <p:sldId xmlns:r="http://schemas.openxmlformats.org/officeDocument/2006/relationships" id="261" r:id="Rbad5c8807e8242a0"/>
-    <p:sldId xmlns:r="http://schemas.openxmlformats.org/officeDocument/2006/relationships" id="262" r:id="R2a89d7e3393e48ee"/>
-    <p:sldId xmlns:r="http://schemas.openxmlformats.org/officeDocument/2006/relationships" id="263" r:id="R01ae81f4f56e42f6"/>
-    <p:sldId xmlns:r="http://schemas.openxmlformats.org/officeDocument/2006/relationships" id="264" r:id="R7151af7c9fa04d89"/>
-    <p:sldId xmlns:r="http://schemas.openxmlformats.org/officeDocument/2006/relationships" id="265" r:id="R4046bd205ef8417a"/>
-    <p:sldId xmlns:r="http://schemas.openxmlformats.org/officeDocument/2006/relationships" id="266" r:id="R6ff1d063f9984ea5"/>
+    <p:sldId xmlns:r="http://schemas.openxmlformats.org/officeDocument/2006/relationships" id="256" r:id="R767a7ee9b3774056"/>
+    <p:sldId xmlns:r="http://schemas.openxmlformats.org/officeDocument/2006/relationships" id="257" r:id="Rf77e2f778c1b4177"/>
+    <p:sldId xmlns:r="http://schemas.openxmlformats.org/officeDocument/2006/relationships" id="258" r:id="R05f71e6330ff47f7"/>
+    <p:sldId xmlns:r="http://schemas.openxmlformats.org/officeDocument/2006/relationships" id="259" r:id="R41095c4412ea41a9"/>
+    <p:sldId xmlns:r="http://schemas.openxmlformats.org/officeDocument/2006/relationships" id="260" r:id="R46ed9a004fb04024"/>
+    <p:sldId xmlns:r="http://schemas.openxmlformats.org/officeDocument/2006/relationships" id="261" r:id="R043b3f9a796241de"/>
+    <p:sldId xmlns:r="http://schemas.openxmlformats.org/officeDocument/2006/relationships" id="262" r:id="Rd5833c2938244c6d"/>
+    <p:sldId xmlns:r="http://schemas.openxmlformats.org/officeDocument/2006/relationships" id="263" r:id="Rb17fbd7e174842fc"/>
+    <p:sldId xmlns:r="http://schemas.openxmlformats.org/officeDocument/2006/relationships" id="264" r:id="R6145413a35854b76"/>
+    <p:sldId xmlns:r="http://schemas.openxmlformats.org/officeDocument/2006/relationships" id="265" r:id="Re76efdbce9e945ea"/>
+    <p:sldId xmlns:r="http://schemas.openxmlformats.org/officeDocument/2006/relationships" id="266" r:id="R2bb434306bb74315"/>
   </p:sldIdLst>
   <p:sldSz cx="12192000" cy="6858000"/>
   <p:notesSz cx="6858000" cy="9144000"/>
@@ -1539,7 +1539,7 @@
           <p:cNvPr id="3" name="Title">
             <a:extLst xmlns:a="http://schemas.openxmlformats.org/drawingml/2006/main">
               <a:ext uri="{FF2B5EF4-FFF2-40B4-BE49-F238E27FC236}">
-                <a16:creationId xmlns:a16="http://schemas.microsoft.com/office/drawing/2014/main" id="{CD9906AD-B144-43F8-946B-F7449C48E964}"/>
+                <a16:creationId xmlns:a16="http://schemas.microsoft.com/office/drawing/2014/main" id="{55548D21-B832-40AF-A029-031FE67B2AFB}"/>
               </a:ext>
             </a:extLst>
           </p:cNvPr>
@@ -1696,7 +1696,7 @@
           <p:cNvPr id="2" name="Subtitle">
             <a:extLst xmlns:a="http://schemas.openxmlformats.org/drawingml/2006/main">
               <a:ext uri="{FF2B5EF4-FFF2-40B4-BE49-F238E27FC236}">
-                <a16:creationId xmlns:a16="http://schemas.microsoft.com/office/drawing/2014/main" id="{51D76C10-5503-4C05-8CD0-28AD2086B0B9}"/>
+                <a16:creationId xmlns:a16="http://schemas.microsoft.com/office/drawing/2014/main" id="{DE4C2936-A74A-4C2F-8404-DCF7B9B13098}"/>
               </a:ext>
             </a:extLst>
           </p:cNvPr>
@@ -1870,7 +1870,7 @@
           <p:cNvPr id="2" name="Section title">
             <a:extLst xmlns:a="http://schemas.openxmlformats.org/drawingml/2006/main">
               <a:ext uri="{FF2B5EF4-FFF2-40B4-BE49-F238E27FC236}">
-                <a16:creationId xmlns:a16="http://schemas.microsoft.com/office/drawing/2014/main" id="{B2515EB7-2D6E-4B43-B4D0-35064194042F}"/>
+                <a16:creationId xmlns:a16="http://schemas.microsoft.com/office/drawing/2014/main" id="{0849CF2D-C99D-4C1B-9F32-998FC1C54941}"/>
               </a:ext>
             </a:extLst>
           </p:cNvPr>
@@ -2044,7 +2044,7 @@
           <p:cNvPr id="3" name="Title">
             <a:extLst xmlns:a="http://schemas.openxmlformats.org/drawingml/2006/main">
               <a:ext uri="{FF2B5EF4-FFF2-40B4-BE49-F238E27FC236}">
-                <a16:creationId xmlns:a16="http://schemas.microsoft.com/office/drawing/2014/main" id="{6851FE5F-B41E-4ECB-B94C-0A82296E96A8}"/>
+                <a16:creationId xmlns:a16="http://schemas.microsoft.com/office/drawing/2014/main" id="{4FAB5A5A-A662-4601-8D4A-BB2AF99FF33B}"/>
               </a:ext>
             </a:extLst>
           </p:cNvPr>
@@ -2201,7 +2201,7 @@
           <p:cNvPr id="2" name="Body">
             <a:extLst xmlns:a="http://schemas.openxmlformats.org/drawingml/2006/main">
               <a:ext uri="{FF2B5EF4-FFF2-40B4-BE49-F238E27FC236}">
-                <a16:creationId xmlns:a16="http://schemas.microsoft.com/office/drawing/2014/main" id="{18973B7D-9C10-4240-98E6-FB693423020C}"/>
+                <a16:creationId xmlns:a16="http://schemas.microsoft.com/office/drawing/2014/main" id="{641A2B08-65E0-429C-9E9A-2FF71A37332B}"/>
               </a:ext>
             </a:extLst>
           </p:cNvPr>
@@ -2375,7 +2375,7 @@
           <p:cNvPr id="4" name="Title">
             <a:extLst xmlns:a="http://schemas.openxmlformats.org/drawingml/2006/main">
               <a:ext uri="{FF2B5EF4-FFF2-40B4-BE49-F238E27FC236}">
-                <a16:creationId xmlns:a16="http://schemas.microsoft.com/office/drawing/2014/main" id="{38E74D69-C761-40E8-B722-4D7337DCE88B}"/>
+                <a16:creationId xmlns:a16="http://schemas.microsoft.com/office/drawing/2014/main" id="{E20A71E4-CD53-45B2-BFEA-408A6C28A093}"/>
               </a:ext>
             </a:extLst>
           </p:cNvPr>
@@ -2532,7 +2532,7 @@
           <p:cNvPr id="2" name="Left column">
             <a:extLst xmlns:a="http://schemas.openxmlformats.org/drawingml/2006/main">
               <a:ext uri="{FF2B5EF4-FFF2-40B4-BE49-F238E27FC236}">
-                <a16:creationId xmlns:a16="http://schemas.microsoft.com/office/drawing/2014/main" id="{C3559385-8469-4513-9C83-7BE4F3DBFF95}"/>
+                <a16:creationId xmlns:a16="http://schemas.microsoft.com/office/drawing/2014/main" id="{CB08FCE5-3508-43B0-82FC-300A61EAF586}"/>
               </a:ext>
             </a:extLst>
           </p:cNvPr>
@@ -2689,7 +2689,7 @@
           <p:cNvPr id="3" name="Right column">
             <a:extLst xmlns:a="http://schemas.openxmlformats.org/drawingml/2006/main">
               <a:ext uri="{FF2B5EF4-FFF2-40B4-BE49-F238E27FC236}">
-                <a16:creationId xmlns:a16="http://schemas.microsoft.com/office/drawing/2014/main" id="{90DEEEE9-A4ED-4552-8B60-660323B268E1}"/>
+                <a16:creationId xmlns:a16="http://schemas.microsoft.com/office/drawing/2014/main" id="{F41CF4DB-296D-445E-874B-3F29F7EDDC3B}"/>
               </a:ext>
             </a:extLst>
           </p:cNvPr>
@@ -2863,7 +2863,7 @@
           <p:cNvPr id="3" name="Title">
             <a:extLst xmlns:a="http://schemas.openxmlformats.org/drawingml/2006/main">
               <a:ext uri="{FF2B5EF4-FFF2-40B4-BE49-F238E27FC236}">
-                <a16:creationId xmlns:a16="http://schemas.microsoft.com/office/drawing/2014/main" id="{3C5E1C09-2248-4661-B6BA-030C20BD2C2D}"/>
+                <a16:creationId xmlns:a16="http://schemas.microsoft.com/office/drawing/2014/main" id="{0BB8CF53-B489-4B41-8444-7AB56E3C712F}"/>
               </a:ext>
             </a:extLst>
           </p:cNvPr>
@@ -3020,7 +3020,7 @@
           <p:cNvPr id="2" name="Left column">
             <a:extLst xmlns:a="http://schemas.openxmlformats.org/drawingml/2006/main">
               <a:ext uri="{FF2B5EF4-FFF2-40B4-BE49-F238E27FC236}">
-                <a16:creationId xmlns:a16="http://schemas.microsoft.com/office/drawing/2014/main" id="{DBF2ADC3-C1EA-4591-ADA3-5C595F1AE61D}"/>
+                <a16:creationId xmlns:a16="http://schemas.microsoft.com/office/drawing/2014/main" id="{B8458444-F2A4-4ABB-8A34-66FC5E859661}"/>
               </a:ext>
             </a:extLst>
           </p:cNvPr>
@@ -3215,12 +3215,12 @@
   </p:cSld>
   <p:clrMap bg1="lt1" tx1="dk1" bg2="lt2" tx2="dk2" accent1="accent1" accent2="accent2" accent3="accent3" accent4="accent4" accent5="accent5" accent6="accent6" hlink="hlink" folHlink="folHlink"/>
   <p:sldLayoutIdLst>
-    <p:sldLayoutId xmlns:r="http://schemas.openxmlformats.org/officeDocument/2006/relationships" id="2147483649" r:id="R4ff55dcb997a4c7d"/>
-    <p:sldLayoutId xmlns:r="http://schemas.openxmlformats.org/officeDocument/2006/relationships" id="2147483650" r:id="R275492936b1646df"/>
-    <p:sldLayoutId xmlns:r="http://schemas.openxmlformats.org/officeDocument/2006/relationships" id="2147483651" r:id="R4dd85fa618cf4a1c"/>
-    <p:sldLayoutId xmlns:r="http://schemas.openxmlformats.org/officeDocument/2006/relationships" id="2147483652" r:id="Readd8ee9ea314194"/>
-    <p:sldLayoutId xmlns:r="http://schemas.openxmlformats.org/officeDocument/2006/relationships" id="2147483653" r:id="R264df400054c4b79"/>
-    <p:sldLayoutId xmlns:r="http://schemas.openxmlformats.org/officeDocument/2006/relationships" id="2147483654" r:id="Ra0982be3d5eb443c"/>
+    <p:sldLayoutId xmlns:r="http://schemas.openxmlformats.org/officeDocument/2006/relationships" id="2147483649" r:id="R382c1efaedca48ae"/>
+    <p:sldLayoutId xmlns:r="http://schemas.openxmlformats.org/officeDocument/2006/relationships" id="2147483650" r:id="R776d826013f94574"/>
+    <p:sldLayoutId xmlns:r="http://schemas.openxmlformats.org/officeDocument/2006/relationships" id="2147483651" r:id="R8235f10be9e74c77"/>
+    <p:sldLayoutId xmlns:r="http://schemas.openxmlformats.org/officeDocument/2006/relationships" id="2147483652" r:id="Rf439656b86f14478"/>
+    <p:sldLayoutId xmlns:r="http://schemas.openxmlformats.org/officeDocument/2006/relationships" id="2147483653" r:id="R0f0561ea31014972"/>
+    <p:sldLayoutId xmlns:r="http://schemas.openxmlformats.org/officeDocument/2006/relationships" id="2147483654" r:id="Rf628982400834b08"/>
   </p:sldLayoutIdLst>
   <p:txStyles>
     <p:titleStyle>
@@ -3771,7 +3771,7 @@
           <p:cNvPr id="6" name="title">
             <a:extLst xmlns:a="http://schemas.openxmlformats.org/drawingml/2006/main">
               <a:ext uri="{FF2B5EF4-FFF2-40B4-BE49-F238E27FC236}">
-                <a16:creationId xmlns:a16="http://schemas.microsoft.com/office/drawing/2014/main" id="{B7998808-F01E-4B38-BC47-AA055363EC2F}"/>
+                <a16:creationId xmlns:a16="http://schemas.microsoft.com/office/drawing/2014/main" id="{683C1606-0BA4-47B3-BB92-B478D61F47BA}"/>
               </a:ext>
             </a:extLst>
           </p:cNvPr>
@@ -3827,7 +3827,7 @@
                 <a:ea typeface="Arial"/>
                 <a:cs typeface="Arial"/>
               </a:rPr>
-              <a:t>GOV.UK Delegate</a:t>
+              <a:t>Delegate</a:t>
             </a:r>
           </a:p>
         </p:txBody>
@@ -3837,7 +3837,7 @@
           <p:cNvPr id="2" name="paragraph-0">
             <a:extLst xmlns:a="http://schemas.openxmlformats.org/drawingml/2006/main">
               <a:ext uri="{FF2B5EF4-FFF2-40B4-BE49-F238E27FC236}">
-                <a16:creationId xmlns:a16="http://schemas.microsoft.com/office/drawing/2014/main" id="{E063F6CD-77BC-4EFA-902D-A06E28980CF2}"/>
+                <a16:creationId xmlns:a16="http://schemas.microsoft.com/office/drawing/2014/main" id="{B8E516A1-EFE6-4CDE-A91C-2E776662F10F}"/>
               </a:ext>
             </a:extLst>
           </p:cNvPr>
@@ -3903,7 +3903,7 @@
           <p:cNvPr id="3" name="paragraph-1">
             <a:extLst xmlns:a="http://schemas.openxmlformats.org/drawingml/2006/main">
               <a:ext uri="{FF2B5EF4-FFF2-40B4-BE49-F238E27FC236}">
-                <a16:creationId xmlns:a16="http://schemas.microsoft.com/office/drawing/2014/main" id="{BA25D069-896B-41B8-9D68-FEE7E74DDE67}"/>
+                <a16:creationId xmlns:a16="http://schemas.microsoft.com/office/drawing/2014/main" id="{9AC64013-ED4B-43EE-98EF-19178922598A}"/>
               </a:ext>
             </a:extLst>
           </p:cNvPr>
@@ -3969,7 +3969,7 @@
           <p:cNvPr id="4" name="disclosure">
             <a:extLst xmlns:a="http://schemas.openxmlformats.org/drawingml/2006/main">
               <a:ext uri="{FF2B5EF4-FFF2-40B4-BE49-F238E27FC236}">
-                <a16:creationId xmlns:a16="http://schemas.microsoft.com/office/drawing/2014/main" id="{4DFAFF6A-DB1E-44B1-80AE-C2BADB6867E8}"/>
+                <a16:creationId xmlns:a16="http://schemas.microsoft.com/office/drawing/2014/main" id="{C359A8B6-F200-46CC-A673-21FA61C322FF}"/>
               </a:ext>
             </a:extLst>
           </p:cNvPr>
@@ -4035,7 +4035,7 @@
           <p:cNvPr id="5" name="page">
             <a:extLst xmlns:a="http://schemas.openxmlformats.org/drawingml/2006/main">
               <a:ext uri="{FF2B5EF4-FFF2-40B4-BE49-F238E27FC236}">
-                <a16:creationId xmlns:a16="http://schemas.microsoft.com/office/drawing/2014/main" id="{375E141B-07DD-47A2-B72C-C5D3EDF5C640}"/>
+                <a16:creationId xmlns:a16="http://schemas.microsoft.com/office/drawing/2014/main" id="{A3678A71-CB19-41EE-ADE7-BEA26DFC3373}"/>
               </a:ext>
             </a:extLst>
           </p:cNvPr>
@@ -4099,7 +4099,7 @@
     </p:spTree>
     <p:extLst>
       <p:ext uri="{BB962C8B-B14F-4D97-AF65-F5344CB8AC3E}">
-        <p14:creationId xmlns:p14="http://schemas.microsoft.com/office/powerpoint/2010/main" val="101426544"/>
+        <p14:creationId xmlns:p14="http://schemas.microsoft.com/office/powerpoint/2010/main" val="834885187"/>
       </p:ext>
     </p:extLst>
   </p:cSld>
@@ -4130,7 +4130,7 @@
           <p:cNvPr id="5" name="title">
             <a:extLst xmlns:a="http://schemas.openxmlformats.org/drawingml/2006/main">
               <a:ext uri="{FF2B5EF4-FFF2-40B4-BE49-F238E27FC236}">
-                <a16:creationId xmlns:a16="http://schemas.microsoft.com/office/drawing/2014/main" id="{3959920D-BB6C-45EF-80EF-9211FC1968CF}"/>
+                <a16:creationId xmlns:a16="http://schemas.microsoft.com/office/drawing/2014/main" id="{35BDF105-BD3E-4EA4-9B32-449D9A94EA87}"/>
               </a:ext>
             </a:extLst>
           </p:cNvPr>
@@ -4196,7 +4196,7 @@
           <p:cNvPr id="2" name="">
             <a:extLst xmlns:a="http://schemas.openxmlformats.org/drawingml/2006/main">
               <a:ext uri="{FF2B5EF4-FFF2-40B4-BE49-F238E27FC236}">
-                <a16:creationId xmlns:a16="http://schemas.microsoft.com/office/drawing/2014/main" id="{8BDD3C4C-AF2B-4B21-9C2C-471A9F1D8783}"/>
+                <a16:creationId xmlns:a16="http://schemas.microsoft.com/office/drawing/2014/main" id="{38EB224C-F76F-429A-9B5D-91DB7BB79AE4}"/>
               </a:ext>
             </a:extLst>
           </p:cNvPr>
@@ -4474,7 +4474,7 @@
           <p:cNvPr id="3" name="disclosure">
             <a:extLst xmlns:a="http://schemas.openxmlformats.org/drawingml/2006/main">
               <a:ext uri="{FF2B5EF4-FFF2-40B4-BE49-F238E27FC236}">
-                <a16:creationId xmlns:a16="http://schemas.microsoft.com/office/drawing/2014/main" id="{45C8D445-D127-4D8C-947E-1FE9070C8887}"/>
+                <a16:creationId xmlns:a16="http://schemas.microsoft.com/office/drawing/2014/main" id="{58C7A03B-E9DD-42D8-A42D-7A40E9F2CB2F}"/>
               </a:ext>
             </a:extLst>
           </p:cNvPr>
@@ -4540,7 +4540,7 @@
           <p:cNvPr id="4" name="page">
             <a:extLst xmlns:a="http://schemas.openxmlformats.org/drawingml/2006/main">
               <a:ext uri="{FF2B5EF4-FFF2-40B4-BE49-F238E27FC236}">
-                <a16:creationId xmlns:a16="http://schemas.microsoft.com/office/drawing/2014/main" id="{52A9AFDC-F3E1-41F8-9389-3BCAB26C4D3B}"/>
+                <a16:creationId xmlns:a16="http://schemas.microsoft.com/office/drawing/2014/main" id="{350A93D3-FBCA-4430-81B7-713BB7CCCB9B}"/>
               </a:ext>
             </a:extLst>
           </p:cNvPr>
@@ -4604,7 +4604,7 @@
     </p:spTree>
     <p:extLst>
       <p:ext uri="{BB962C8B-B14F-4D97-AF65-F5344CB8AC3E}">
-        <p14:creationId xmlns:p14="http://schemas.microsoft.com/office/powerpoint/2010/main" val="1376681530"/>
+        <p14:creationId xmlns:p14="http://schemas.microsoft.com/office/powerpoint/2010/main" val="820077050"/>
       </p:ext>
     </p:extLst>
   </p:cSld>
@@ -4635,7 +4635,7 @@
           <p:cNvPr id="6" name="title">
             <a:extLst xmlns:a="http://schemas.openxmlformats.org/drawingml/2006/main">
               <a:ext uri="{FF2B5EF4-FFF2-40B4-BE49-F238E27FC236}">
-                <a16:creationId xmlns:a16="http://schemas.microsoft.com/office/drawing/2014/main" id="{794577DB-0E3E-4ED4-A36D-B86011AF50AA}"/>
+                <a16:creationId xmlns:a16="http://schemas.microsoft.com/office/drawing/2014/main" id="{A2FA75BF-E449-4284-93E1-6C9512BCDC2F}"/>
               </a:ext>
             </a:extLst>
           </p:cNvPr>
@@ -4691,7 +4691,7 @@
                 <a:ea typeface="Arial"/>
                 <a:cs typeface="Arial"/>
               </a:rPr>
-              <a:t>Discussion with Public Digital</a:t>
+              <a:t>Discussion</a:t>
             </a:r>
           </a:p>
         </p:txBody>
@@ -4701,7 +4701,7 @@
           <p:cNvPr id="2" name="paragraph-0">
             <a:extLst xmlns:a="http://schemas.openxmlformats.org/drawingml/2006/main">
               <a:ext uri="{FF2B5EF4-FFF2-40B4-BE49-F238E27FC236}">
-                <a16:creationId xmlns:a16="http://schemas.microsoft.com/office/drawing/2014/main" id="{DF28FC46-D915-4E6E-8333-391F6635DCCA}"/>
+                <a16:creationId xmlns:a16="http://schemas.microsoft.com/office/drawing/2014/main" id="{3CD8AC0D-6766-4412-9689-EAF64E5319FE}"/>
               </a:ext>
             </a:extLst>
           </p:cNvPr>
@@ -4767,7 +4767,7 @@
           <p:cNvPr id="3" name="paragraph-1">
             <a:extLst xmlns:a="http://schemas.openxmlformats.org/drawingml/2006/main">
               <a:ext uri="{FF2B5EF4-FFF2-40B4-BE49-F238E27FC236}">
-                <a16:creationId xmlns:a16="http://schemas.microsoft.com/office/drawing/2014/main" id="{8FDC42BC-5FED-4E29-8926-43F01C3E89F0}"/>
+                <a16:creationId xmlns:a16="http://schemas.microsoft.com/office/drawing/2014/main" id="{7D60AD58-04E8-4EFF-BC9A-BB85713680D7}"/>
               </a:ext>
             </a:extLst>
           </p:cNvPr>
@@ -4833,7 +4833,7 @@
           <p:cNvPr id="4" name="disclosure">
             <a:extLst xmlns:a="http://schemas.openxmlformats.org/drawingml/2006/main">
               <a:ext uri="{FF2B5EF4-FFF2-40B4-BE49-F238E27FC236}">
-                <a16:creationId xmlns:a16="http://schemas.microsoft.com/office/drawing/2014/main" id="{035F4DD6-4E29-447B-B5F4-03B52B42DCB1}"/>
+                <a16:creationId xmlns:a16="http://schemas.microsoft.com/office/drawing/2014/main" id="{82412673-7661-4547-B085-4D5A83971640}"/>
               </a:ext>
             </a:extLst>
           </p:cNvPr>
@@ -4899,7 +4899,7 @@
           <p:cNvPr id="5" name="page">
             <a:extLst xmlns:a="http://schemas.openxmlformats.org/drawingml/2006/main">
               <a:ext uri="{FF2B5EF4-FFF2-40B4-BE49-F238E27FC236}">
-                <a16:creationId xmlns:a16="http://schemas.microsoft.com/office/drawing/2014/main" id="{668D9A4F-2F34-4B46-9941-AC27308A72AC}"/>
+                <a16:creationId xmlns:a16="http://schemas.microsoft.com/office/drawing/2014/main" id="{3609CF63-A5D8-40EF-ACA2-88D536063A5D}"/>
               </a:ext>
             </a:extLst>
           </p:cNvPr>
@@ -4963,7 +4963,7 @@
     </p:spTree>
     <p:extLst>
       <p:ext uri="{BB962C8B-B14F-4D97-AF65-F5344CB8AC3E}">
-        <p14:creationId xmlns:p14="http://schemas.microsoft.com/office/powerpoint/2010/main" val="1837745401"/>
+        <p14:creationId xmlns:p14="http://schemas.microsoft.com/office/powerpoint/2010/main" val="2047178753"/>
       </p:ext>
     </p:extLst>
   </p:cSld>
@@ -4994,7 +4994,7 @@
           <p:cNvPr id="6" name="title">
             <a:extLst xmlns:a="http://schemas.openxmlformats.org/drawingml/2006/main">
               <a:ext uri="{FF2B5EF4-FFF2-40B4-BE49-F238E27FC236}">
-                <a16:creationId xmlns:a16="http://schemas.microsoft.com/office/drawing/2014/main" id="{1FE032E3-61F9-4A11-8C1A-448AABC29EEB}"/>
+                <a16:creationId xmlns:a16="http://schemas.microsoft.com/office/drawing/2014/main" id="{F9B96352-C0F4-4283-835A-8EC226E11FF3}"/>
               </a:ext>
             </a:extLst>
           </p:cNvPr>
@@ -5060,7 +5060,7 @@
           <p:cNvPr id="2" name="paragraph-0">
             <a:extLst xmlns:a="http://schemas.openxmlformats.org/drawingml/2006/main">
               <a:ext uri="{FF2B5EF4-FFF2-40B4-BE49-F238E27FC236}">
-                <a16:creationId xmlns:a16="http://schemas.microsoft.com/office/drawing/2014/main" id="{298F032C-DFE3-41F3-BE64-92C2071D78C8}"/>
+                <a16:creationId xmlns:a16="http://schemas.microsoft.com/office/drawing/2014/main" id="{9D37DA50-B8A4-4B68-A8AC-CC890EE244F9}"/>
               </a:ext>
             </a:extLst>
           </p:cNvPr>
@@ -5126,7 +5126,7 @@
           <p:cNvPr id="3" name="paragraph-1">
             <a:extLst xmlns:a="http://schemas.openxmlformats.org/drawingml/2006/main">
               <a:ext uri="{FF2B5EF4-FFF2-40B4-BE49-F238E27FC236}">
-                <a16:creationId xmlns:a16="http://schemas.microsoft.com/office/drawing/2014/main" id="{EA017FD2-DF86-4F43-A6CF-42D4C3391A87}"/>
+                <a16:creationId xmlns:a16="http://schemas.microsoft.com/office/drawing/2014/main" id="{57D80E83-2D28-4A00-A06C-0134F67C6FF8}"/>
               </a:ext>
             </a:extLst>
           </p:cNvPr>
@@ -5192,7 +5192,7 @@
           <p:cNvPr id="4" name="disclosure">
             <a:extLst xmlns:a="http://schemas.openxmlformats.org/drawingml/2006/main">
               <a:ext uri="{FF2B5EF4-FFF2-40B4-BE49-F238E27FC236}">
-                <a16:creationId xmlns:a16="http://schemas.microsoft.com/office/drawing/2014/main" id="{4F0BF343-2FDB-4B27-ABB9-69F328E39C2F}"/>
+                <a16:creationId xmlns:a16="http://schemas.microsoft.com/office/drawing/2014/main" id="{7CDA060F-8B60-4369-BBE2-525D6D40C340}"/>
               </a:ext>
             </a:extLst>
           </p:cNvPr>
@@ -5258,7 +5258,7 @@
           <p:cNvPr id="5" name="page">
             <a:extLst xmlns:a="http://schemas.openxmlformats.org/drawingml/2006/main">
               <a:ext uri="{FF2B5EF4-FFF2-40B4-BE49-F238E27FC236}">
-                <a16:creationId xmlns:a16="http://schemas.microsoft.com/office/drawing/2014/main" id="{EB84868C-E970-4704-BE0A-4F0382297BE3}"/>
+                <a16:creationId xmlns:a16="http://schemas.microsoft.com/office/drawing/2014/main" id="{DC83808F-D25E-4579-BC10-5BE4BD4C4E7C}"/>
               </a:ext>
             </a:extLst>
           </p:cNvPr>
@@ -5322,7 +5322,7 @@
     </p:spTree>
     <p:extLst>
       <p:ext uri="{BB962C8B-B14F-4D97-AF65-F5344CB8AC3E}">
-        <p14:creationId xmlns:p14="http://schemas.microsoft.com/office/powerpoint/2010/main" val="1864678164"/>
+        <p14:creationId xmlns:p14="http://schemas.microsoft.com/office/powerpoint/2010/main" val="1614887490"/>
       </p:ext>
     </p:extLst>
   </p:cSld>
@@ -5353,7 +5353,7 @@
           <p:cNvPr id="6" name="title">
             <a:extLst xmlns:a="http://schemas.openxmlformats.org/drawingml/2006/main">
               <a:ext uri="{FF2B5EF4-FFF2-40B4-BE49-F238E27FC236}">
-                <a16:creationId xmlns:a16="http://schemas.microsoft.com/office/drawing/2014/main" id="{E78D3E9D-728B-4C80-A239-8B4632B9FD78}"/>
+                <a16:creationId xmlns:a16="http://schemas.microsoft.com/office/drawing/2014/main" id="{D8B7C720-DD59-4929-AFD3-01F479972632}"/>
               </a:ext>
             </a:extLst>
           </p:cNvPr>
@@ -5419,7 +5419,7 @@
           <p:cNvPr id="2" name="paragraph-0">
             <a:extLst xmlns:a="http://schemas.openxmlformats.org/drawingml/2006/main">
               <a:ext uri="{FF2B5EF4-FFF2-40B4-BE49-F238E27FC236}">
-                <a16:creationId xmlns:a16="http://schemas.microsoft.com/office/drawing/2014/main" id="{DD054570-F135-4264-BE48-6A81C3D0F18E}"/>
+                <a16:creationId xmlns:a16="http://schemas.microsoft.com/office/drawing/2014/main" id="{94AE524C-C7B0-4C1C-95AD-5555D80736A9}"/>
               </a:ext>
             </a:extLst>
           </p:cNvPr>
@@ -5485,7 +5485,7 @@
           <p:cNvPr id="3" name="paragraph-1">
             <a:extLst xmlns:a="http://schemas.openxmlformats.org/drawingml/2006/main">
               <a:ext uri="{FF2B5EF4-FFF2-40B4-BE49-F238E27FC236}">
-                <a16:creationId xmlns:a16="http://schemas.microsoft.com/office/drawing/2014/main" id="{7EA2BF51-B1B7-4A8E-8375-F7DCA9DB04BD}"/>
+                <a16:creationId xmlns:a16="http://schemas.microsoft.com/office/drawing/2014/main" id="{9C97CB9C-7F02-4E30-B8EF-F0808026D57B}"/>
               </a:ext>
             </a:extLst>
           </p:cNvPr>
@@ -5551,7 +5551,7 @@
           <p:cNvPr id="4" name="disclosure">
             <a:extLst xmlns:a="http://schemas.openxmlformats.org/drawingml/2006/main">
               <a:ext uri="{FF2B5EF4-FFF2-40B4-BE49-F238E27FC236}">
-                <a16:creationId xmlns:a16="http://schemas.microsoft.com/office/drawing/2014/main" id="{6FE00153-6A54-4CFC-A6DB-626B36199775}"/>
+                <a16:creationId xmlns:a16="http://schemas.microsoft.com/office/drawing/2014/main" id="{EEB1246F-B128-4D46-BD87-DDFC6EDE14FB}"/>
               </a:ext>
             </a:extLst>
           </p:cNvPr>
@@ -5617,7 +5617,7 @@
           <p:cNvPr id="5" name="page">
             <a:extLst xmlns:a="http://schemas.openxmlformats.org/drawingml/2006/main">
               <a:ext uri="{FF2B5EF4-FFF2-40B4-BE49-F238E27FC236}">
-                <a16:creationId xmlns:a16="http://schemas.microsoft.com/office/drawing/2014/main" id="{52D4A62B-21A1-4349-B3A2-D0D42CEA6FC3}"/>
+                <a16:creationId xmlns:a16="http://schemas.microsoft.com/office/drawing/2014/main" id="{AEA717C5-70BB-4065-B0CF-A354688695CD}"/>
               </a:ext>
             </a:extLst>
           </p:cNvPr>
@@ -5681,7 +5681,7 @@
     </p:spTree>
     <p:extLst>
       <p:ext uri="{BB962C8B-B14F-4D97-AF65-F5344CB8AC3E}">
-        <p14:creationId xmlns:p14="http://schemas.microsoft.com/office/powerpoint/2010/main" val="1592734062"/>
+        <p14:creationId xmlns:p14="http://schemas.microsoft.com/office/powerpoint/2010/main" val="223565753"/>
       </p:ext>
     </p:extLst>
   </p:cSld>
@@ -5712,7 +5712,7 @@
           <p:cNvPr id="6" name="title">
             <a:extLst xmlns:a="http://schemas.openxmlformats.org/drawingml/2006/main">
               <a:ext uri="{FF2B5EF4-FFF2-40B4-BE49-F238E27FC236}">
-                <a16:creationId xmlns:a16="http://schemas.microsoft.com/office/drawing/2014/main" id="{C7E70F81-B1F6-459E-B574-9479A1E1A589}"/>
+                <a16:creationId xmlns:a16="http://schemas.microsoft.com/office/drawing/2014/main" id="{951BC0CC-0C96-411A-B4F1-20B3C21465FF}"/>
               </a:ext>
             </a:extLst>
           </p:cNvPr>
@@ -5778,7 +5778,7 @@
           <p:cNvPr id="2" name="paragraph-0">
             <a:extLst xmlns:a="http://schemas.openxmlformats.org/drawingml/2006/main">
               <a:ext uri="{FF2B5EF4-FFF2-40B4-BE49-F238E27FC236}">
-                <a16:creationId xmlns:a16="http://schemas.microsoft.com/office/drawing/2014/main" id="{F5DBDFC0-5F0C-441C-B9E9-7A9386AA68A0}"/>
+                <a16:creationId xmlns:a16="http://schemas.microsoft.com/office/drawing/2014/main" id="{0B9063A7-EE74-4430-8B1C-74D67F8FBD2E}"/>
               </a:ext>
             </a:extLst>
           </p:cNvPr>
@@ -5844,7 +5844,7 @@
           <p:cNvPr id="3" name="paragraph-1">
             <a:extLst xmlns:a="http://schemas.openxmlformats.org/drawingml/2006/main">
               <a:ext uri="{FF2B5EF4-FFF2-40B4-BE49-F238E27FC236}">
-                <a16:creationId xmlns:a16="http://schemas.microsoft.com/office/drawing/2014/main" id="{E6900DE6-D04C-4891-A507-16E186F2EF57}"/>
+                <a16:creationId xmlns:a16="http://schemas.microsoft.com/office/drawing/2014/main" id="{EC02ECC5-70B0-4E63-A218-B361BE8BB4B3}"/>
               </a:ext>
             </a:extLst>
           </p:cNvPr>
@@ -5910,7 +5910,7 @@
           <p:cNvPr id="4" name="disclosure">
             <a:extLst xmlns:a="http://schemas.openxmlformats.org/drawingml/2006/main">
               <a:ext uri="{FF2B5EF4-FFF2-40B4-BE49-F238E27FC236}">
-                <a16:creationId xmlns:a16="http://schemas.microsoft.com/office/drawing/2014/main" id="{8BFD9787-C8B5-49E5-93E0-CC5FB3D74391}"/>
+                <a16:creationId xmlns:a16="http://schemas.microsoft.com/office/drawing/2014/main" id="{8CD71DD6-6B50-44C5-8081-77C0B857DFCB}"/>
               </a:ext>
             </a:extLst>
           </p:cNvPr>
@@ -5976,7 +5976,7 @@
           <p:cNvPr id="5" name="page">
             <a:extLst xmlns:a="http://schemas.openxmlformats.org/drawingml/2006/main">
               <a:ext uri="{FF2B5EF4-FFF2-40B4-BE49-F238E27FC236}">
-                <a16:creationId xmlns:a16="http://schemas.microsoft.com/office/drawing/2014/main" id="{C0B72AD7-27B3-4B8C-B0B8-C79B5FD2EE7B}"/>
+                <a16:creationId xmlns:a16="http://schemas.microsoft.com/office/drawing/2014/main" id="{4E278715-88D4-4839-B12F-F72D419ED859}"/>
               </a:ext>
             </a:extLst>
           </p:cNvPr>
@@ -6040,7 +6040,7 @@
     </p:spTree>
     <p:extLst>
       <p:ext uri="{BB962C8B-B14F-4D97-AF65-F5344CB8AC3E}">
-        <p14:creationId xmlns:p14="http://schemas.microsoft.com/office/powerpoint/2010/main" val="259852925"/>
+        <p14:creationId xmlns:p14="http://schemas.microsoft.com/office/powerpoint/2010/main" val="1368252280"/>
       </p:ext>
     </p:extLst>
   </p:cSld>
@@ -6071,7 +6071,7 @@
           <p:cNvPr id="5" name="title">
             <a:extLst xmlns:a="http://schemas.openxmlformats.org/drawingml/2006/main">
               <a:ext uri="{FF2B5EF4-FFF2-40B4-BE49-F238E27FC236}">
-                <a16:creationId xmlns:a16="http://schemas.microsoft.com/office/drawing/2014/main" id="{C9BCD9C9-9B69-4703-BCDD-D5B3DF4EB001}"/>
+                <a16:creationId xmlns:a16="http://schemas.microsoft.com/office/drawing/2014/main" id="{93FC22D6-A8A7-46BC-A84D-DE4C1D138C69}"/>
               </a:ext>
             </a:extLst>
           </p:cNvPr>
@@ -6137,7 +6137,7 @@
           <p:cNvPr id="2" name="">
             <a:extLst xmlns:a="http://schemas.openxmlformats.org/drawingml/2006/main">
               <a:ext uri="{FF2B5EF4-FFF2-40B4-BE49-F238E27FC236}">
-                <a16:creationId xmlns:a16="http://schemas.microsoft.com/office/drawing/2014/main" id="{4C3876D2-EDC9-4EB6-890F-977591D83F57}"/>
+                <a16:creationId xmlns:a16="http://schemas.microsoft.com/office/drawing/2014/main" id="{284EFF05-57E3-4C4A-9A0D-2B3AD16EDE18}"/>
               </a:ext>
             </a:extLst>
           </p:cNvPr>
@@ -6365,7 +6365,7 @@
           <p:cNvPr id="3" name="disclosure">
             <a:extLst xmlns:a="http://schemas.openxmlformats.org/drawingml/2006/main">
               <a:ext uri="{FF2B5EF4-FFF2-40B4-BE49-F238E27FC236}">
-                <a16:creationId xmlns:a16="http://schemas.microsoft.com/office/drawing/2014/main" id="{34B8D89F-43D6-40C0-9386-F55D08BCB067}"/>
+                <a16:creationId xmlns:a16="http://schemas.microsoft.com/office/drawing/2014/main" id="{696C70CF-DD94-4AA5-B165-D0FBF532AD5F}"/>
               </a:ext>
             </a:extLst>
           </p:cNvPr>
@@ -6431,7 +6431,7 @@
           <p:cNvPr id="4" name="page">
             <a:extLst xmlns:a="http://schemas.openxmlformats.org/drawingml/2006/main">
               <a:ext uri="{FF2B5EF4-FFF2-40B4-BE49-F238E27FC236}">
-                <a16:creationId xmlns:a16="http://schemas.microsoft.com/office/drawing/2014/main" id="{B803A9C1-D695-4450-AFF0-1E7597BE79CA}"/>
+                <a16:creationId xmlns:a16="http://schemas.microsoft.com/office/drawing/2014/main" id="{B7E6D1A2-3305-4174-9CE0-0F0F5F44C6B7}"/>
               </a:ext>
             </a:extLst>
           </p:cNvPr>
@@ -6495,7 +6495,7 @@
     </p:spTree>
     <p:extLst>
       <p:ext uri="{BB962C8B-B14F-4D97-AF65-F5344CB8AC3E}">
-        <p14:creationId xmlns:p14="http://schemas.microsoft.com/office/powerpoint/2010/main" val="613967849"/>
+        <p14:creationId xmlns:p14="http://schemas.microsoft.com/office/powerpoint/2010/main" val="937018581"/>
       </p:ext>
     </p:extLst>
   </p:cSld>
@@ -6526,7 +6526,7 @@
           <p:cNvPr id="5" name="title">
             <a:extLst xmlns:a="http://schemas.openxmlformats.org/drawingml/2006/main">
               <a:ext uri="{FF2B5EF4-FFF2-40B4-BE49-F238E27FC236}">
-                <a16:creationId xmlns:a16="http://schemas.microsoft.com/office/drawing/2014/main" id="{3E6A998A-B7AD-4463-9D9C-821E9EBC425B}"/>
+                <a16:creationId xmlns:a16="http://schemas.microsoft.com/office/drawing/2014/main" id="{4248FB0D-5D9F-42AA-8C13-D95C127C5D96}"/>
               </a:ext>
             </a:extLst>
           </p:cNvPr>
@@ -6592,7 +6592,7 @@
           <p:cNvPr id="2" name="">
             <a:extLst xmlns:a="http://schemas.openxmlformats.org/drawingml/2006/main">
               <a:ext uri="{FF2B5EF4-FFF2-40B4-BE49-F238E27FC236}">
-                <a16:creationId xmlns:a16="http://schemas.microsoft.com/office/drawing/2014/main" id="{9583822C-90B2-43E6-B837-81CAFBA67303}"/>
+                <a16:creationId xmlns:a16="http://schemas.microsoft.com/office/drawing/2014/main" id="{F0B3C9CF-6422-4781-B7C1-E4713640C542}"/>
               </a:ext>
             </a:extLst>
           </p:cNvPr>
@@ -6820,7 +6820,7 @@
           <p:cNvPr id="3" name="disclosure">
             <a:extLst xmlns:a="http://schemas.openxmlformats.org/drawingml/2006/main">
               <a:ext uri="{FF2B5EF4-FFF2-40B4-BE49-F238E27FC236}">
-                <a16:creationId xmlns:a16="http://schemas.microsoft.com/office/drawing/2014/main" id="{C1C6D675-2E40-44D9-888D-0DBE8054FB3E}"/>
+                <a16:creationId xmlns:a16="http://schemas.microsoft.com/office/drawing/2014/main" id="{299260D2-0503-4889-A86A-0F257613EEAE}"/>
               </a:ext>
             </a:extLst>
           </p:cNvPr>
@@ -6886,7 +6886,7 @@
           <p:cNvPr id="4" name="page">
             <a:extLst xmlns:a="http://schemas.openxmlformats.org/drawingml/2006/main">
               <a:ext uri="{FF2B5EF4-FFF2-40B4-BE49-F238E27FC236}">
-                <a16:creationId xmlns:a16="http://schemas.microsoft.com/office/drawing/2014/main" id="{9E5267FA-4E3E-4885-A050-58B178148B41}"/>
+                <a16:creationId xmlns:a16="http://schemas.microsoft.com/office/drawing/2014/main" id="{2EC4AB43-C953-490F-9622-668B5EAF5A1B}"/>
               </a:ext>
             </a:extLst>
           </p:cNvPr>
@@ -6950,7 +6950,7 @@
     </p:spTree>
     <p:extLst>
       <p:ext uri="{BB962C8B-B14F-4D97-AF65-F5344CB8AC3E}">
-        <p14:creationId xmlns:p14="http://schemas.microsoft.com/office/powerpoint/2010/main" val="479847278"/>
+        <p14:creationId xmlns:p14="http://schemas.microsoft.com/office/powerpoint/2010/main" val="1191613506"/>
       </p:ext>
     </p:extLst>
   </p:cSld>
@@ -6981,7 +6981,7 @@
           <p:cNvPr id="8" name="title">
             <a:extLst xmlns:a="http://schemas.openxmlformats.org/drawingml/2006/main">
               <a:ext uri="{FF2B5EF4-FFF2-40B4-BE49-F238E27FC236}">
-                <a16:creationId xmlns:a16="http://schemas.microsoft.com/office/drawing/2014/main" id="{727086F5-A28C-498A-8F1C-838E8069D087}"/>
+                <a16:creationId xmlns:a16="http://schemas.microsoft.com/office/drawing/2014/main" id="{08B310BD-C061-44C9-800B-44B40A362176}"/>
               </a:ext>
             </a:extLst>
           </p:cNvPr>
@@ -7047,7 +7047,7 @@
           <p:cNvPr id="2" name="paragraph-0">
             <a:extLst xmlns:a="http://schemas.openxmlformats.org/drawingml/2006/main">
               <a:ext uri="{FF2B5EF4-FFF2-40B4-BE49-F238E27FC236}">
-                <a16:creationId xmlns:a16="http://schemas.microsoft.com/office/drawing/2014/main" id="{905E459A-842D-49AD-901C-7C52A02865B0}"/>
+                <a16:creationId xmlns:a16="http://schemas.microsoft.com/office/drawing/2014/main" id="{D60C85B2-D8F8-4866-9D15-F38F6C9C7AF7}"/>
               </a:ext>
             </a:extLst>
           </p:cNvPr>
@@ -7113,7 +7113,7 @@
           <p:cNvPr id="3" name="paragraph-1">
             <a:extLst xmlns:a="http://schemas.openxmlformats.org/drawingml/2006/main">
               <a:ext uri="{FF2B5EF4-FFF2-40B4-BE49-F238E27FC236}">
-                <a16:creationId xmlns:a16="http://schemas.microsoft.com/office/drawing/2014/main" id="{E53B83F5-3BC9-4B28-8266-A7F5BC1890B8}"/>
+                <a16:creationId xmlns:a16="http://schemas.microsoft.com/office/drawing/2014/main" id="{A758B352-BAAB-46D8-A618-611AB62194BA}"/>
               </a:ext>
             </a:extLst>
           </p:cNvPr>
@@ -7179,7 +7179,7 @@
           <p:cNvPr id="4" name="">
             <a:extLst xmlns:a="http://schemas.openxmlformats.org/drawingml/2006/main">
               <a:ext uri="{FF2B5EF4-FFF2-40B4-BE49-F238E27FC236}">
-                <a16:creationId xmlns:a16="http://schemas.microsoft.com/office/drawing/2014/main" id="{4470045F-44A9-468E-AF51-C3AE919E92B5}"/>
+                <a16:creationId xmlns:a16="http://schemas.microsoft.com/office/drawing/2014/main" id="{4F861D5E-6C49-49DA-891F-4781978B20AA}"/>
               </a:ext>
             </a:extLst>
           </p:cNvPr>
@@ -7189,7 +7189,7 @@
           <p:nvPr/>
         </p:nvPicPr>
         <p:blipFill>
-          <a:blip xmlns:r="http://schemas.openxmlformats.org/officeDocument/2006/relationships" xmlns:a="http://schemas.openxmlformats.org/drawingml/2006/main" r:embed="R00a87fb598964eba"/>
+          <a:blip xmlns:r="http://schemas.openxmlformats.org/officeDocument/2006/relationships" xmlns:a="http://schemas.openxmlformats.org/drawingml/2006/main" r:embed="Rb312e30a7d634d14"/>
           <a:stretch xmlns:a="http://schemas.openxmlformats.org/drawingml/2006/main"/>
         </p:blipFill>
         <p:spPr>
@@ -7207,7 +7207,7 @@
           <p:cNvPr id="5" name="image-provenance">
             <a:extLst xmlns:a="http://schemas.openxmlformats.org/drawingml/2006/main">
               <a:ext uri="{FF2B5EF4-FFF2-40B4-BE49-F238E27FC236}">
-                <a16:creationId xmlns:a16="http://schemas.microsoft.com/office/drawing/2014/main" id="{7D3375C3-C070-415C-B148-F61A625F3E06}"/>
+                <a16:creationId xmlns:a16="http://schemas.microsoft.com/office/drawing/2014/main" id="{3077D72F-7F72-480B-B8ED-C763A9145A23}"/>
               </a:ext>
             </a:extLst>
           </p:cNvPr>
@@ -7273,7 +7273,7 @@
           <p:cNvPr id="6" name="disclosure">
             <a:extLst xmlns:a="http://schemas.openxmlformats.org/drawingml/2006/main">
               <a:ext uri="{FF2B5EF4-FFF2-40B4-BE49-F238E27FC236}">
-                <a16:creationId xmlns:a16="http://schemas.microsoft.com/office/drawing/2014/main" id="{1F206D5B-CB44-467A-B266-8FF4256CA64A}"/>
+                <a16:creationId xmlns:a16="http://schemas.microsoft.com/office/drawing/2014/main" id="{0EE6851B-098F-4F4D-8545-C1CA6677D350}"/>
               </a:ext>
             </a:extLst>
           </p:cNvPr>
@@ -7339,7 +7339,7 @@
           <p:cNvPr id="7" name="page">
             <a:extLst xmlns:a="http://schemas.openxmlformats.org/drawingml/2006/main">
               <a:ext uri="{FF2B5EF4-FFF2-40B4-BE49-F238E27FC236}">
-                <a16:creationId xmlns:a16="http://schemas.microsoft.com/office/drawing/2014/main" id="{DB045297-B590-44B1-A6DA-4C7858FD42DB}"/>
+                <a16:creationId xmlns:a16="http://schemas.microsoft.com/office/drawing/2014/main" id="{316EB06E-F63D-41C2-A10E-40E6CBDD3957}"/>
               </a:ext>
             </a:extLst>
           </p:cNvPr>
@@ -7403,7 +7403,7 @@
     </p:spTree>
     <p:extLst>
       <p:ext uri="{BB962C8B-B14F-4D97-AF65-F5344CB8AC3E}">
-        <p14:creationId xmlns:p14="http://schemas.microsoft.com/office/powerpoint/2010/main" val="931908382"/>
+        <p14:creationId xmlns:p14="http://schemas.microsoft.com/office/powerpoint/2010/main" val="1237130866"/>
       </p:ext>
     </p:extLst>
   </p:cSld>
@@ -7434,7 +7434,7 @@
           <p:cNvPr id="6" name="title">
             <a:extLst xmlns:a="http://schemas.openxmlformats.org/drawingml/2006/main">
               <a:ext uri="{FF2B5EF4-FFF2-40B4-BE49-F238E27FC236}">
-                <a16:creationId xmlns:a16="http://schemas.microsoft.com/office/drawing/2014/main" id="{4C0C2402-6497-48DB-AA4E-D0C4673B6DFB}"/>
+                <a16:creationId xmlns:a16="http://schemas.microsoft.com/office/drawing/2014/main" id="{A59B60C5-FAD3-4E34-A84A-7E9FEC21F2E8}"/>
               </a:ext>
             </a:extLst>
           </p:cNvPr>
@@ -7500,7 +7500,7 @@
           <p:cNvPr id="2" name="paragraph-0">
             <a:extLst xmlns:a="http://schemas.openxmlformats.org/drawingml/2006/main">
               <a:ext uri="{FF2B5EF4-FFF2-40B4-BE49-F238E27FC236}">
-                <a16:creationId xmlns:a16="http://schemas.microsoft.com/office/drawing/2014/main" id="{F41DDC09-38AA-494D-A207-20550EFD2908}"/>
+                <a16:creationId xmlns:a16="http://schemas.microsoft.com/office/drawing/2014/main" id="{ED909F35-4DBE-47C4-AEA3-B0ABA6FDC08F}"/>
               </a:ext>
             </a:extLst>
           </p:cNvPr>
@@ -7566,7 +7566,7 @@
           <p:cNvPr id="3" name="paragraph-1">
             <a:extLst xmlns:a="http://schemas.openxmlformats.org/drawingml/2006/main">
               <a:ext uri="{FF2B5EF4-FFF2-40B4-BE49-F238E27FC236}">
-                <a16:creationId xmlns:a16="http://schemas.microsoft.com/office/drawing/2014/main" id="{D0E2DD45-395C-440C-9351-A707A8037964}"/>
+                <a16:creationId xmlns:a16="http://schemas.microsoft.com/office/drawing/2014/main" id="{133DC30D-32D3-4143-A535-DCCF486FD053}"/>
               </a:ext>
             </a:extLst>
           </p:cNvPr>
@@ -7632,7 +7632,7 @@
           <p:cNvPr id="4" name="disclosure">
             <a:extLst xmlns:a="http://schemas.openxmlformats.org/drawingml/2006/main">
               <a:ext uri="{FF2B5EF4-FFF2-40B4-BE49-F238E27FC236}">
-                <a16:creationId xmlns:a16="http://schemas.microsoft.com/office/drawing/2014/main" id="{7EF891EE-2DDF-4650-B24D-461438B0C722}"/>
+                <a16:creationId xmlns:a16="http://schemas.microsoft.com/office/drawing/2014/main" id="{6B518220-4787-4C14-8574-49BBCE9C2BD7}"/>
               </a:ext>
             </a:extLst>
           </p:cNvPr>
@@ -7698,7 +7698,7 @@
           <p:cNvPr id="5" name="page">
             <a:extLst xmlns:a="http://schemas.openxmlformats.org/drawingml/2006/main">
               <a:ext uri="{FF2B5EF4-FFF2-40B4-BE49-F238E27FC236}">
-                <a16:creationId xmlns:a16="http://schemas.microsoft.com/office/drawing/2014/main" id="{DB127CC7-529B-49DE-B455-EBA168BE99E0}"/>
+                <a16:creationId xmlns:a16="http://schemas.microsoft.com/office/drawing/2014/main" id="{B14A47E1-4218-45D6-BA4F-475533EA97B0}"/>
               </a:ext>
             </a:extLst>
           </p:cNvPr>
@@ -7762,7 +7762,7 @@
     </p:spTree>
     <p:extLst>
       <p:ext uri="{BB962C8B-B14F-4D97-AF65-F5344CB8AC3E}">
-        <p14:creationId xmlns:p14="http://schemas.microsoft.com/office/powerpoint/2010/main" val="224153932"/>
+        <p14:creationId xmlns:p14="http://schemas.microsoft.com/office/powerpoint/2010/main" val="105413393"/>
       </p:ext>
     </p:extLst>
   </p:cSld>
@@ -7793,7 +7793,7 @@
           <p:cNvPr id="6" name="title">
             <a:extLst xmlns:a="http://schemas.openxmlformats.org/drawingml/2006/main">
               <a:ext uri="{FF2B5EF4-FFF2-40B4-BE49-F238E27FC236}">
-                <a16:creationId xmlns:a16="http://schemas.microsoft.com/office/drawing/2014/main" id="{C6D72776-9CE9-4EB6-B8C9-F223139F549B}"/>
+                <a16:creationId xmlns:a16="http://schemas.microsoft.com/office/drawing/2014/main" id="{F439347C-C098-48E5-912D-7F9256C921F0}"/>
               </a:ext>
             </a:extLst>
           </p:cNvPr>
@@ -7859,7 +7859,7 @@
           <p:cNvPr id="2" name="paragraph-0">
             <a:extLst xmlns:a="http://schemas.openxmlformats.org/drawingml/2006/main">
               <a:ext uri="{FF2B5EF4-FFF2-40B4-BE49-F238E27FC236}">
-                <a16:creationId xmlns:a16="http://schemas.microsoft.com/office/drawing/2014/main" id="{6BA84E30-D2B4-4BA0-BE36-5F573AED76DF}"/>
+                <a16:creationId xmlns:a16="http://schemas.microsoft.com/office/drawing/2014/main" id="{5ADDA217-D831-4E00-8586-6388A3FA1182}"/>
               </a:ext>
             </a:extLst>
           </p:cNvPr>
@@ -7925,7 +7925,7 @@
           <p:cNvPr id="3" name="paragraph-1">
             <a:extLst xmlns:a="http://schemas.openxmlformats.org/drawingml/2006/main">
               <a:ext uri="{FF2B5EF4-FFF2-40B4-BE49-F238E27FC236}">
-                <a16:creationId xmlns:a16="http://schemas.microsoft.com/office/drawing/2014/main" id="{496FAF72-6EC2-49E6-A0EE-4CC353A69547}"/>
+                <a16:creationId xmlns:a16="http://schemas.microsoft.com/office/drawing/2014/main" id="{5683C92F-1BEC-4F8A-8E8E-8C91EE921553}"/>
               </a:ext>
             </a:extLst>
           </p:cNvPr>
@@ -7991,7 +7991,7 @@
           <p:cNvPr id="4" name="disclosure">
             <a:extLst xmlns:a="http://schemas.openxmlformats.org/drawingml/2006/main">
               <a:ext uri="{FF2B5EF4-FFF2-40B4-BE49-F238E27FC236}">
-                <a16:creationId xmlns:a16="http://schemas.microsoft.com/office/drawing/2014/main" id="{9D4BDF0E-22DC-4D14-A8CA-77EB9C8E56D4}"/>
+                <a16:creationId xmlns:a16="http://schemas.microsoft.com/office/drawing/2014/main" id="{2DD2217E-609B-458C-86AD-80364842F01A}"/>
               </a:ext>
             </a:extLst>
           </p:cNvPr>
@@ -8057,7 +8057,7 @@
           <p:cNvPr id="5" name="page">
             <a:extLst xmlns:a="http://schemas.openxmlformats.org/drawingml/2006/main">
               <a:ext uri="{FF2B5EF4-FFF2-40B4-BE49-F238E27FC236}">
-                <a16:creationId xmlns:a16="http://schemas.microsoft.com/office/drawing/2014/main" id="{0A812833-6DC4-4034-99E3-E8A699D7BF3C}"/>
+                <a16:creationId xmlns:a16="http://schemas.microsoft.com/office/drawing/2014/main" id="{952DA80B-8890-4E2B-9AEB-9DC1BE2BD868}"/>
               </a:ext>
             </a:extLst>
           </p:cNvPr>
@@ -8121,7 +8121,7 @@
     </p:spTree>
     <p:extLst>
       <p:ext uri="{BB962C8B-B14F-4D97-AF65-F5344CB8AC3E}">
-        <p14:creationId xmlns:p14="http://schemas.microsoft.com/office/powerpoint/2010/main" val="1120001263"/>
+        <p14:creationId xmlns:p14="http://schemas.microsoft.com/office/powerpoint/2010/main" val="1274276615"/>
       </p:ext>
     </p:extLst>
   </p:cSld>

--- a/apps/about/public/briefings/high-level.pptx
+++ b/apps/about/public/briefings/high-level.pptx
@@ -2,23 +2,23 @@
 <file path=ppt/presentation.xml><?xml version="1.0" encoding="utf-8"?>
 <p:presentation xmlns:p="http://schemas.openxmlformats.org/presentationml/2006/main">
   <p:sldMasterIdLst>
-    <p:sldMasterId xmlns:r="http://schemas.openxmlformats.org/officeDocument/2006/relationships" id="2147483648" r:id="R409640eae0954471"/>
+    <p:sldMasterId xmlns:r="http://schemas.openxmlformats.org/officeDocument/2006/relationships" id="2147483648" r:id="R6540307778de487c"/>
   </p:sldMasterIdLst>
   <p:notesMasterIdLst>
-    <p:notesMasterId xmlns:r="http://schemas.openxmlformats.org/officeDocument/2006/relationships" r:id="Rffaa4912da04448a"/>
+    <p:notesMasterId xmlns:r="http://schemas.openxmlformats.org/officeDocument/2006/relationships" r:id="R8c77e77b4eac4c86"/>
   </p:notesMasterIdLst>
   <p:sldIdLst>
-    <p:sldId xmlns:r="http://schemas.openxmlformats.org/officeDocument/2006/relationships" id="256" r:id="R767a7ee9b3774056"/>
-    <p:sldId xmlns:r="http://schemas.openxmlformats.org/officeDocument/2006/relationships" id="257" r:id="Rf77e2f778c1b4177"/>
-    <p:sldId xmlns:r="http://schemas.openxmlformats.org/officeDocument/2006/relationships" id="258" r:id="R05f71e6330ff47f7"/>
-    <p:sldId xmlns:r="http://schemas.openxmlformats.org/officeDocument/2006/relationships" id="259" r:id="R41095c4412ea41a9"/>
-    <p:sldId xmlns:r="http://schemas.openxmlformats.org/officeDocument/2006/relationships" id="260" r:id="R46ed9a004fb04024"/>
-    <p:sldId xmlns:r="http://schemas.openxmlformats.org/officeDocument/2006/relationships" id="261" r:id="R043b3f9a796241de"/>
-    <p:sldId xmlns:r="http://schemas.openxmlformats.org/officeDocument/2006/relationships" id="262" r:id="Rd5833c2938244c6d"/>
-    <p:sldId xmlns:r="http://schemas.openxmlformats.org/officeDocument/2006/relationships" id="263" r:id="Rb17fbd7e174842fc"/>
-    <p:sldId xmlns:r="http://schemas.openxmlformats.org/officeDocument/2006/relationships" id="264" r:id="R6145413a35854b76"/>
-    <p:sldId xmlns:r="http://schemas.openxmlformats.org/officeDocument/2006/relationships" id="265" r:id="Re76efdbce9e945ea"/>
-    <p:sldId xmlns:r="http://schemas.openxmlformats.org/officeDocument/2006/relationships" id="266" r:id="R2bb434306bb74315"/>
+    <p:sldId xmlns:r="http://schemas.openxmlformats.org/officeDocument/2006/relationships" id="256" r:id="R1e64fd1751ad4d95"/>
+    <p:sldId xmlns:r="http://schemas.openxmlformats.org/officeDocument/2006/relationships" id="257" r:id="R04002858f3cf4ca1"/>
+    <p:sldId xmlns:r="http://schemas.openxmlformats.org/officeDocument/2006/relationships" id="258" r:id="R16acc17cffcf4fca"/>
+    <p:sldId xmlns:r="http://schemas.openxmlformats.org/officeDocument/2006/relationships" id="259" r:id="R2c7e896fc1ee4338"/>
+    <p:sldId xmlns:r="http://schemas.openxmlformats.org/officeDocument/2006/relationships" id="260" r:id="R2ab5e3e5ff08463e"/>
+    <p:sldId xmlns:r="http://schemas.openxmlformats.org/officeDocument/2006/relationships" id="261" r:id="R848f9968a0d84019"/>
+    <p:sldId xmlns:r="http://schemas.openxmlformats.org/officeDocument/2006/relationships" id="262" r:id="R7b36fe18dd0c4848"/>
+    <p:sldId xmlns:r="http://schemas.openxmlformats.org/officeDocument/2006/relationships" id="263" r:id="R140bcfc318a147aa"/>
+    <p:sldId xmlns:r="http://schemas.openxmlformats.org/officeDocument/2006/relationships" id="264" r:id="Re756b48b03f841c6"/>
+    <p:sldId xmlns:r="http://schemas.openxmlformats.org/officeDocument/2006/relationships" id="265" r:id="R709594d1e35b4183"/>
+    <p:sldId xmlns:r="http://schemas.openxmlformats.org/officeDocument/2006/relationships" id="266" r:id="R3b4d99a969a241e4"/>
   </p:sldIdLst>
   <p:sldSz cx="12192000" cy="6858000"/>
   <p:notesSz cx="6858000" cy="9144000"/>
@@ -477,7 +477,7 @@
           </a:p>
           <a:p xmlns:a="http://schemas.openxmlformats.org/drawingml/2006/main">
             <a:r>
-              <a:t>Prepared 10 October 2026. Main baseline 6b4f3895f246cfe9e274059c57e4dc1ea7989650. Observatory PRs 109–110 unmerged at preparation.</a:t>
+              <a:t>Prepared 10 October 2026. Original preparation baseline 6b4f3895f246cfe9e274059c57e4dc1ea7989650. Status refreshed 10 October 2026: Observatory PRs 109–110 merged. Dated evidence remains at its recorded revision.</a:t>
             </a:r>
           </a:p>
         </p:txBody>
@@ -582,7 +582,7 @@
           </a:p>
           <a:p xmlns:a="http://schemas.openxmlformats.org/drawingml/2006/main">
             <a:r>
-              <a:t>Prepared 10 October 2026. Main baseline 6b4f3895f246cfe9e274059c57e4dc1ea7989650. Observatory PRs 109–110 unmerged at preparation.</a:t>
+              <a:t>Prepared 10 October 2026. Original preparation baseline 6b4f3895f246cfe9e274059c57e4dc1ea7989650. Status refreshed 10 October 2026: Observatory PRs 109–110 merged. Dated evidence remains at its recorded revision.</a:t>
             </a:r>
           </a:p>
         </p:txBody>
@@ -682,7 +682,7 @@
           </a:p>
           <a:p xmlns:a="http://schemas.openxmlformats.org/drawingml/2006/main">
             <a:r>
-              <a:t>Prepared 10 October 2026. Main baseline 6b4f3895f246cfe9e274059c57e4dc1ea7989650. Observatory PRs 109–110 unmerged at preparation.</a:t>
+              <a:t>Prepared 10 October 2026. Original preparation baseline 6b4f3895f246cfe9e274059c57e4dc1ea7989650. Status refreshed 10 October 2026: Observatory PRs 109–110 merged. Dated evidence remains at its recorded revision.</a:t>
             </a:r>
           </a:p>
         </p:txBody>
@@ -787,7 +787,7 @@
           </a:p>
           <a:p xmlns:a="http://schemas.openxmlformats.org/drawingml/2006/main">
             <a:r>
-              <a:t>Prepared 10 October 2026. Main baseline 6b4f3895f246cfe9e274059c57e4dc1ea7989650. Observatory PRs 109–110 unmerged at preparation.</a:t>
+              <a:t>Prepared 10 October 2026. Original preparation baseline 6b4f3895f246cfe9e274059c57e4dc1ea7989650. Status refreshed 10 October 2026: Observatory PRs 109–110 merged. Dated evidence remains at its recorded revision.</a:t>
             </a:r>
           </a:p>
         </p:txBody>
@@ -887,7 +887,7 @@
           </a:p>
           <a:p xmlns:a="http://schemas.openxmlformats.org/drawingml/2006/main">
             <a:r>
-              <a:t>Prepared 10 October 2026. Main baseline 6b4f3895f246cfe9e274059c57e4dc1ea7989650. Observatory PRs 109–110 unmerged at preparation.</a:t>
+              <a:t>Prepared 10 October 2026. Original preparation baseline 6b4f3895f246cfe9e274059c57e4dc1ea7989650. Status refreshed 10 October 2026: Observatory PRs 109–110 merged. Dated evidence remains at its recorded revision.</a:t>
             </a:r>
           </a:p>
         </p:txBody>
@@ -982,7 +982,7 @@
           </a:p>
           <a:p xmlns:a="http://schemas.openxmlformats.org/drawingml/2006/main">
             <a:r>
-              <a:t>Prepared 10 October 2026. Main baseline 6b4f3895f246cfe9e274059c57e4dc1ea7989650. Observatory PRs 109–110 unmerged at preparation.</a:t>
+              <a:t>Prepared 10 October 2026. Original preparation baseline 6b4f3895f246cfe9e274059c57e4dc1ea7989650. Status refreshed 10 October 2026: Observatory PRs 109–110 merged. Dated evidence remains at its recorded revision.</a:t>
             </a:r>
           </a:p>
         </p:txBody>
@@ -1082,7 +1082,7 @@
           </a:p>
           <a:p xmlns:a="http://schemas.openxmlformats.org/drawingml/2006/main">
             <a:r>
-              <a:t>Prepared 10 October 2026. Main baseline 6b4f3895f246cfe9e274059c57e4dc1ea7989650. Observatory PRs 109–110 unmerged at preparation.</a:t>
+              <a:t>Prepared 10 October 2026. Original preparation baseline 6b4f3895f246cfe9e274059c57e4dc1ea7989650. Status refreshed 10 October 2026: Observatory PRs 109–110 merged. Dated evidence remains at its recorded revision.</a:t>
             </a:r>
           </a:p>
         </p:txBody>
@@ -1182,7 +1182,7 @@
           </a:p>
           <a:p xmlns:a="http://schemas.openxmlformats.org/drawingml/2006/main">
             <a:r>
-              <a:t>Prepared 10 October 2026. Main baseline 6b4f3895f246cfe9e274059c57e4dc1ea7989650. Observatory PRs 109–110 unmerged at preparation.</a:t>
+              <a:t>Prepared 10 October 2026. Original preparation baseline 6b4f3895f246cfe9e274059c57e4dc1ea7989650. Status refreshed 10 October 2026: Observatory PRs 109–110 merged. Dated evidence remains at its recorded revision.</a:t>
             </a:r>
           </a:p>
         </p:txBody>
@@ -1252,7 +1252,7 @@
           <a:lstStyle xmlns:a="http://schemas.openxmlformats.org/drawingml/2006/main"/>
           <a:p xmlns:a="http://schemas.openxmlformats.org/drawingml/2006/main">
             <a:r>
-              <a:t>Demo C requires the unmerged dashboard and classifier PRs in a reviewed isolated stack. Use the read-only monitoring view first. Ground truth in research view describes audited scripted execution, not an inferred label. Combining clues is the proposed approach; its accuracy still needs testing on varied agents and people. Protected execution labels remain separate from predictions. The current deterministic signature stub reports observed signature evidence. It is not a trained AI detector. Actual vendor validation remains outstanding.</a:t>
+              <a:t>Demo C uses the merged Observatory dashboard and classifier contract (PRs 110 and 109) in a configured isolated stack. Use the read-only monitoring view first. Ground truth in research view describes audited scripted execution, not an inferred label. Combining clues is the proposed approach; its accuracy still needs testing on varied agents and people. Protected execution labels remain separate from predictions. The current deterministic signature stub reports observed signature evidence. It is not a trained AI detector. Actual vendor validation remains outstanding.</a:t>
             </a:r>
           </a:p>
           <a:p xmlns:a="http://schemas.openxmlformats.org/drawingml/2006/main">
@@ -1267,12 +1267,12 @@
           </a:p>
           <a:p xmlns:a="http://schemas.openxmlformats.org/drawingml/2006/main">
             <a:r>
-              <a:t>Observatory dashboard, PR 110, unmerged at preparation: https://github.com/sighmoan1/govuk-delegate-starter/pull/110</a:t>
-            </a:r>
-          </a:p>
-          <a:p xmlns:a="http://schemas.openxmlformats.org/drawingml/2006/main">
-            <a:r>
-              <a:t>Blind classifier contract, PR 109, unmerged at preparation: https://github.com/sighmoan1/govuk-delegate-starter/pull/109</a:t>
+              <a:t>Observatory dashboard, PR 110, merged: https://github.com/sighmoan1/govuk-delegate-starter/pull/110</a:t>
+            </a:r>
+          </a:p>
+          <a:p xmlns:a="http://schemas.openxmlformats.org/drawingml/2006/main">
+            <a:r>
+              <a:t>Blind classifier contract, PR 109, merged: https://github.com/sighmoan1/govuk-delegate-starter/pull/109</a:t>
             </a:r>
           </a:p>
           <a:p xmlns:a="http://schemas.openxmlformats.org/drawingml/2006/main">
@@ -1287,7 +1287,7 @@
           </a:p>
           <a:p xmlns:a="http://schemas.openxmlformats.org/drawingml/2006/main">
             <a:r>
-              <a:t>Prepared 10 October 2026. Main baseline 6b4f3895f246cfe9e274059c57e4dc1ea7989650. Observatory PRs 109–110 unmerged at preparation.</a:t>
+              <a:t>Prepared 10 October 2026. Original preparation baseline 6b4f3895f246cfe9e274059c57e4dc1ea7989650. Status refreshed 10 October 2026: Observatory PRs 109–110 merged. Dated evidence remains at its recorded revision.</a:t>
             </a:r>
           </a:p>
         </p:txBody>
@@ -1387,7 +1387,7 @@
           </a:p>
           <a:p xmlns:a="http://schemas.openxmlformats.org/drawingml/2006/main">
             <a:r>
-              <a:t>Prepared 10 October 2026. Main baseline 6b4f3895f246cfe9e274059c57e4dc1ea7989650. Observatory PRs 109–110 unmerged at preparation.</a:t>
+              <a:t>Prepared 10 October 2026. Original preparation baseline 6b4f3895f246cfe9e274059c57e4dc1ea7989650. Status refreshed 10 October 2026: Observatory PRs 109–110 merged. Dated evidence remains at its recorded revision.</a:t>
             </a:r>
           </a:p>
         </p:txBody>
@@ -1492,7 +1492,7 @@
           </a:p>
           <a:p xmlns:a="http://schemas.openxmlformats.org/drawingml/2006/main">
             <a:r>
-              <a:t>Prepared 10 October 2026. Main baseline 6b4f3895f246cfe9e274059c57e4dc1ea7989650. Observatory PRs 109–110 unmerged at preparation.</a:t>
+              <a:t>Prepared 10 October 2026. Original preparation baseline 6b4f3895f246cfe9e274059c57e4dc1ea7989650. Status refreshed 10 October 2026: Observatory PRs 109–110 merged. Dated evidence remains at its recorded revision.</a:t>
             </a:r>
           </a:p>
         </p:txBody>
@@ -1539,7 +1539,7 @@
           <p:cNvPr id="3" name="Title">
             <a:extLst xmlns:a="http://schemas.openxmlformats.org/drawingml/2006/main">
               <a:ext uri="{FF2B5EF4-FFF2-40B4-BE49-F238E27FC236}">
-                <a16:creationId xmlns:a16="http://schemas.microsoft.com/office/drawing/2014/main" id="{55548D21-B832-40AF-A029-031FE67B2AFB}"/>
+                <a16:creationId xmlns:a16="http://schemas.microsoft.com/office/drawing/2014/main" id="{BDE346F8-3DED-40F0-9B98-B752218F0093}"/>
               </a:ext>
             </a:extLst>
           </p:cNvPr>
@@ -1696,7 +1696,7 @@
           <p:cNvPr id="2" name="Subtitle">
             <a:extLst xmlns:a="http://schemas.openxmlformats.org/drawingml/2006/main">
               <a:ext uri="{FF2B5EF4-FFF2-40B4-BE49-F238E27FC236}">
-                <a16:creationId xmlns:a16="http://schemas.microsoft.com/office/drawing/2014/main" id="{DE4C2936-A74A-4C2F-8404-DCF7B9B13098}"/>
+                <a16:creationId xmlns:a16="http://schemas.microsoft.com/office/drawing/2014/main" id="{2B8576BD-82CB-4BF2-9AB0-A6BA1A4C5AE6}"/>
               </a:ext>
             </a:extLst>
           </p:cNvPr>
@@ -1870,7 +1870,7 @@
           <p:cNvPr id="2" name="Section title">
             <a:extLst xmlns:a="http://schemas.openxmlformats.org/drawingml/2006/main">
               <a:ext uri="{FF2B5EF4-FFF2-40B4-BE49-F238E27FC236}">
-                <a16:creationId xmlns:a16="http://schemas.microsoft.com/office/drawing/2014/main" id="{0849CF2D-C99D-4C1B-9F32-998FC1C54941}"/>
+                <a16:creationId xmlns:a16="http://schemas.microsoft.com/office/drawing/2014/main" id="{7484B279-5039-4B07-B32F-42239D00B119}"/>
               </a:ext>
             </a:extLst>
           </p:cNvPr>
@@ -2044,7 +2044,7 @@
           <p:cNvPr id="3" name="Title">
             <a:extLst xmlns:a="http://schemas.openxmlformats.org/drawingml/2006/main">
               <a:ext uri="{FF2B5EF4-FFF2-40B4-BE49-F238E27FC236}">
-                <a16:creationId xmlns:a16="http://schemas.microsoft.com/office/drawing/2014/main" id="{4FAB5A5A-A662-4601-8D4A-BB2AF99FF33B}"/>
+                <a16:creationId xmlns:a16="http://schemas.microsoft.com/office/drawing/2014/main" id="{4C224269-66A6-414E-97D4-5C1EAEBE9D3E}"/>
               </a:ext>
             </a:extLst>
           </p:cNvPr>
@@ -2201,7 +2201,7 @@
           <p:cNvPr id="2" name="Body">
             <a:extLst xmlns:a="http://schemas.openxmlformats.org/drawingml/2006/main">
               <a:ext uri="{FF2B5EF4-FFF2-40B4-BE49-F238E27FC236}">
-                <a16:creationId xmlns:a16="http://schemas.microsoft.com/office/drawing/2014/main" id="{641A2B08-65E0-429C-9E9A-2FF71A37332B}"/>
+                <a16:creationId xmlns:a16="http://schemas.microsoft.com/office/drawing/2014/main" id="{C341D06E-B3C7-4082-86F7-E35F851A6C48}"/>
               </a:ext>
             </a:extLst>
           </p:cNvPr>
@@ -2375,7 +2375,7 @@
           <p:cNvPr id="4" name="Title">
             <a:extLst xmlns:a="http://schemas.openxmlformats.org/drawingml/2006/main">
               <a:ext uri="{FF2B5EF4-FFF2-40B4-BE49-F238E27FC236}">
-                <a16:creationId xmlns:a16="http://schemas.microsoft.com/office/drawing/2014/main" id="{E20A71E4-CD53-45B2-BFEA-408A6C28A093}"/>
+                <a16:creationId xmlns:a16="http://schemas.microsoft.com/office/drawing/2014/main" id="{9E67D2A1-6C08-4DEB-AFD5-FD414CC9CCB9}"/>
               </a:ext>
             </a:extLst>
           </p:cNvPr>
@@ -2532,7 +2532,7 @@
           <p:cNvPr id="2" name="Left column">
             <a:extLst xmlns:a="http://schemas.openxmlformats.org/drawingml/2006/main">
               <a:ext uri="{FF2B5EF4-FFF2-40B4-BE49-F238E27FC236}">
-                <a16:creationId xmlns:a16="http://schemas.microsoft.com/office/drawing/2014/main" id="{CB08FCE5-3508-43B0-82FC-300A61EAF586}"/>
+                <a16:creationId xmlns:a16="http://schemas.microsoft.com/office/drawing/2014/main" id="{1B043A12-8912-4E2C-9E91-23820F1D1078}"/>
               </a:ext>
             </a:extLst>
           </p:cNvPr>
@@ -2689,7 +2689,7 @@
           <p:cNvPr id="3" name="Right column">
             <a:extLst xmlns:a="http://schemas.openxmlformats.org/drawingml/2006/main">
               <a:ext uri="{FF2B5EF4-FFF2-40B4-BE49-F238E27FC236}">
-                <a16:creationId xmlns:a16="http://schemas.microsoft.com/office/drawing/2014/main" id="{F41CF4DB-296D-445E-874B-3F29F7EDDC3B}"/>
+                <a16:creationId xmlns:a16="http://schemas.microsoft.com/office/drawing/2014/main" id="{B0B7A709-A843-485D-892B-B9264F8AE9A4}"/>
               </a:ext>
             </a:extLst>
           </p:cNvPr>
@@ -2863,7 +2863,7 @@
           <p:cNvPr id="3" name="Title">
             <a:extLst xmlns:a="http://schemas.openxmlformats.org/drawingml/2006/main">
               <a:ext uri="{FF2B5EF4-FFF2-40B4-BE49-F238E27FC236}">
-                <a16:creationId xmlns:a16="http://schemas.microsoft.com/office/drawing/2014/main" id="{0BB8CF53-B489-4B41-8444-7AB56E3C712F}"/>
+                <a16:creationId xmlns:a16="http://schemas.microsoft.com/office/drawing/2014/main" id="{3E3312D0-E7F6-4EE9-931F-454C185C6AFB}"/>
               </a:ext>
             </a:extLst>
           </p:cNvPr>
@@ -3020,7 +3020,7 @@
           <p:cNvPr id="2" name="Left column">
             <a:extLst xmlns:a="http://schemas.openxmlformats.org/drawingml/2006/main">
               <a:ext uri="{FF2B5EF4-FFF2-40B4-BE49-F238E27FC236}">
-                <a16:creationId xmlns:a16="http://schemas.microsoft.com/office/drawing/2014/main" id="{B8458444-F2A4-4ABB-8A34-66FC5E859661}"/>
+                <a16:creationId xmlns:a16="http://schemas.microsoft.com/office/drawing/2014/main" id="{361BE95B-B63B-4468-8BF9-A4CC1F456AA9}"/>
               </a:ext>
             </a:extLst>
           </p:cNvPr>
@@ -3215,12 +3215,12 @@
   </p:cSld>
   <p:clrMap bg1="lt1" tx1="dk1" bg2="lt2" tx2="dk2" accent1="accent1" accent2="accent2" accent3="accent3" accent4="accent4" accent5="accent5" accent6="accent6" hlink="hlink" folHlink="folHlink"/>
   <p:sldLayoutIdLst>
-    <p:sldLayoutId xmlns:r="http://schemas.openxmlformats.org/officeDocument/2006/relationships" id="2147483649" r:id="R382c1efaedca48ae"/>
-    <p:sldLayoutId xmlns:r="http://schemas.openxmlformats.org/officeDocument/2006/relationships" id="2147483650" r:id="R776d826013f94574"/>
-    <p:sldLayoutId xmlns:r="http://schemas.openxmlformats.org/officeDocument/2006/relationships" id="2147483651" r:id="R8235f10be9e74c77"/>
-    <p:sldLayoutId xmlns:r="http://schemas.openxmlformats.org/officeDocument/2006/relationships" id="2147483652" r:id="Rf439656b86f14478"/>
-    <p:sldLayoutId xmlns:r="http://schemas.openxmlformats.org/officeDocument/2006/relationships" id="2147483653" r:id="R0f0561ea31014972"/>
-    <p:sldLayoutId xmlns:r="http://schemas.openxmlformats.org/officeDocument/2006/relationships" id="2147483654" r:id="Rf628982400834b08"/>
+    <p:sldLayoutId xmlns:r="http://schemas.openxmlformats.org/officeDocument/2006/relationships" id="2147483649" r:id="R0d1b91720ed64481"/>
+    <p:sldLayoutId xmlns:r="http://schemas.openxmlformats.org/officeDocument/2006/relationships" id="2147483650" r:id="Ra87b82b1d619455c"/>
+    <p:sldLayoutId xmlns:r="http://schemas.openxmlformats.org/officeDocument/2006/relationships" id="2147483651" r:id="R8110fd506cc74282"/>
+    <p:sldLayoutId xmlns:r="http://schemas.openxmlformats.org/officeDocument/2006/relationships" id="2147483652" r:id="Rf5099821fefd4617"/>
+    <p:sldLayoutId xmlns:r="http://schemas.openxmlformats.org/officeDocument/2006/relationships" id="2147483653" r:id="R5f9956e1d1ab498a"/>
+    <p:sldLayoutId xmlns:r="http://schemas.openxmlformats.org/officeDocument/2006/relationships" id="2147483654" r:id="Rd7416b15734348ed"/>
   </p:sldLayoutIdLst>
   <p:txStyles>
     <p:titleStyle>
@@ -3771,7 +3771,7 @@
           <p:cNvPr id="6" name="title">
             <a:extLst xmlns:a="http://schemas.openxmlformats.org/drawingml/2006/main">
               <a:ext uri="{FF2B5EF4-FFF2-40B4-BE49-F238E27FC236}">
-                <a16:creationId xmlns:a16="http://schemas.microsoft.com/office/drawing/2014/main" id="{683C1606-0BA4-47B3-BB92-B478D61F47BA}"/>
+                <a16:creationId xmlns:a16="http://schemas.microsoft.com/office/drawing/2014/main" id="{C53BCD1F-51E3-4197-861E-87A2611F26AB}"/>
               </a:ext>
             </a:extLst>
           </p:cNvPr>
@@ -3837,7 +3837,7 @@
           <p:cNvPr id="2" name="paragraph-0">
             <a:extLst xmlns:a="http://schemas.openxmlformats.org/drawingml/2006/main">
               <a:ext uri="{FF2B5EF4-FFF2-40B4-BE49-F238E27FC236}">
-                <a16:creationId xmlns:a16="http://schemas.microsoft.com/office/drawing/2014/main" id="{B8E516A1-EFE6-4CDE-A91C-2E776662F10F}"/>
+                <a16:creationId xmlns:a16="http://schemas.microsoft.com/office/drawing/2014/main" id="{76271E3D-5BF0-4CA8-A7C0-FD4FDF86CF4E}"/>
               </a:ext>
             </a:extLst>
           </p:cNvPr>
@@ -3903,7 +3903,7 @@
           <p:cNvPr id="3" name="paragraph-1">
             <a:extLst xmlns:a="http://schemas.openxmlformats.org/drawingml/2006/main">
               <a:ext uri="{FF2B5EF4-FFF2-40B4-BE49-F238E27FC236}">
-                <a16:creationId xmlns:a16="http://schemas.microsoft.com/office/drawing/2014/main" id="{9AC64013-ED4B-43EE-98EF-19178922598A}"/>
+                <a16:creationId xmlns:a16="http://schemas.microsoft.com/office/drawing/2014/main" id="{70316910-C9D2-4968-9407-6E021257CA74}"/>
               </a:ext>
             </a:extLst>
           </p:cNvPr>
@@ -3969,7 +3969,7 @@
           <p:cNvPr id="4" name="disclosure">
             <a:extLst xmlns:a="http://schemas.openxmlformats.org/drawingml/2006/main">
               <a:ext uri="{FF2B5EF4-FFF2-40B4-BE49-F238E27FC236}">
-                <a16:creationId xmlns:a16="http://schemas.microsoft.com/office/drawing/2014/main" id="{C359A8B6-F200-46CC-A673-21FA61C322FF}"/>
+                <a16:creationId xmlns:a16="http://schemas.microsoft.com/office/drawing/2014/main" id="{FA80DC09-8F18-4B87-901F-5005E72B294F}"/>
               </a:ext>
             </a:extLst>
           </p:cNvPr>
@@ -4035,7 +4035,7 @@
           <p:cNvPr id="5" name="page">
             <a:extLst xmlns:a="http://schemas.openxmlformats.org/drawingml/2006/main">
               <a:ext uri="{FF2B5EF4-FFF2-40B4-BE49-F238E27FC236}">
-                <a16:creationId xmlns:a16="http://schemas.microsoft.com/office/drawing/2014/main" id="{A3678A71-CB19-41EE-ADE7-BEA26DFC3373}"/>
+                <a16:creationId xmlns:a16="http://schemas.microsoft.com/office/drawing/2014/main" id="{A6825D49-8DAE-4FF5-B2BC-A59255001D71}"/>
               </a:ext>
             </a:extLst>
           </p:cNvPr>
@@ -4099,7 +4099,7 @@
     </p:spTree>
     <p:extLst>
       <p:ext uri="{BB962C8B-B14F-4D97-AF65-F5344CB8AC3E}">
-        <p14:creationId xmlns:p14="http://schemas.microsoft.com/office/powerpoint/2010/main" val="834885187"/>
+        <p14:creationId xmlns:p14="http://schemas.microsoft.com/office/powerpoint/2010/main" val="810835401"/>
       </p:ext>
     </p:extLst>
   </p:cSld>
@@ -4130,7 +4130,7 @@
           <p:cNvPr id="5" name="title">
             <a:extLst xmlns:a="http://schemas.openxmlformats.org/drawingml/2006/main">
               <a:ext uri="{FF2B5EF4-FFF2-40B4-BE49-F238E27FC236}">
-                <a16:creationId xmlns:a16="http://schemas.microsoft.com/office/drawing/2014/main" id="{35BDF105-BD3E-4EA4-9B32-449D9A94EA87}"/>
+                <a16:creationId xmlns:a16="http://schemas.microsoft.com/office/drawing/2014/main" id="{A95C3428-8B37-406C-A460-D1B9FE8F3CED}"/>
               </a:ext>
             </a:extLst>
           </p:cNvPr>
@@ -4196,7 +4196,7 @@
           <p:cNvPr id="2" name="">
             <a:extLst xmlns:a="http://schemas.openxmlformats.org/drawingml/2006/main">
               <a:ext uri="{FF2B5EF4-FFF2-40B4-BE49-F238E27FC236}">
-                <a16:creationId xmlns:a16="http://schemas.microsoft.com/office/drawing/2014/main" id="{38EB224C-F76F-429A-9B5D-91DB7BB79AE4}"/>
+                <a16:creationId xmlns:a16="http://schemas.microsoft.com/office/drawing/2014/main" id="{A76F6AE4-0F73-4A28-8B46-CBAF6E19D8B9}"/>
               </a:ext>
             </a:extLst>
           </p:cNvPr>
@@ -4474,7 +4474,7 @@
           <p:cNvPr id="3" name="disclosure">
             <a:extLst xmlns:a="http://schemas.openxmlformats.org/drawingml/2006/main">
               <a:ext uri="{FF2B5EF4-FFF2-40B4-BE49-F238E27FC236}">
-                <a16:creationId xmlns:a16="http://schemas.microsoft.com/office/drawing/2014/main" id="{58C7A03B-E9DD-42D8-A42D-7A40E9F2CB2F}"/>
+                <a16:creationId xmlns:a16="http://schemas.microsoft.com/office/drawing/2014/main" id="{434EE9FA-8E2F-4570-8C18-577D69663531}"/>
               </a:ext>
             </a:extLst>
           </p:cNvPr>
@@ -4540,7 +4540,7 @@
           <p:cNvPr id="4" name="page">
             <a:extLst xmlns:a="http://schemas.openxmlformats.org/drawingml/2006/main">
               <a:ext uri="{FF2B5EF4-FFF2-40B4-BE49-F238E27FC236}">
-                <a16:creationId xmlns:a16="http://schemas.microsoft.com/office/drawing/2014/main" id="{350A93D3-FBCA-4430-81B7-713BB7CCCB9B}"/>
+                <a16:creationId xmlns:a16="http://schemas.microsoft.com/office/drawing/2014/main" id="{D48E8494-1F79-4486-A44C-04A453272DB9}"/>
               </a:ext>
             </a:extLst>
           </p:cNvPr>
@@ -4604,7 +4604,7 @@
     </p:spTree>
     <p:extLst>
       <p:ext uri="{BB962C8B-B14F-4D97-AF65-F5344CB8AC3E}">
-        <p14:creationId xmlns:p14="http://schemas.microsoft.com/office/powerpoint/2010/main" val="820077050"/>
+        <p14:creationId xmlns:p14="http://schemas.microsoft.com/office/powerpoint/2010/main" val="1799125657"/>
       </p:ext>
     </p:extLst>
   </p:cSld>
@@ -4635,7 +4635,7 @@
           <p:cNvPr id="6" name="title">
             <a:extLst xmlns:a="http://schemas.openxmlformats.org/drawingml/2006/main">
               <a:ext uri="{FF2B5EF4-FFF2-40B4-BE49-F238E27FC236}">
-                <a16:creationId xmlns:a16="http://schemas.microsoft.com/office/drawing/2014/main" id="{A2FA75BF-E449-4284-93E1-6C9512BCDC2F}"/>
+                <a16:creationId xmlns:a16="http://schemas.microsoft.com/office/drawing/2014/main" id="{7742CE73-BAA8-49E9-BE5E-14564AC9D8FE}"/>
               </a:ext>
             </a:extLst>
           </p:cNvPr>
@@ -4701,7 +4701,7 @@
           <p:cNvPr id="2" name="paragraph-0">
             <a:extLst xmlns:a="http://schemas.openxmlformats.org/drawingml/2006/main">
               <a:ext uri="{FF2B5EF4-FFF2-40B4-BE49-F238E27FC236}">
-                <a16:creationId xmlns:a16="http://schemas.microsoft.com/office/drawing/2014/main" id="{3CD8AC0D-6766-4412-9689-EAF64E5319FE}"/>
+                <a16:creationId xmlns:a16="http://schemas.microsoft.com/office/drawing/2014/main" id="{BF85A327-11D4-4001-B9F1-AF7AF3E3CB6E}"/>
               </a:ext>
             </a:extLst>
           </p:cNvPr>
@@ -4767,7 +4767,7 @@
           <p:cNvPr id="3" name="paragraph-1">
             <a:extLst xmlns:a="http://schemas.openxmlformats.org/drawingml/2006/main">
               <a:ext uri="{FF2B5EF4-FFF2-40B4-BE49-F238E27FC236}">
-                <a16:creationId xmlns:a16="http://schemas.microsoft.com/office/drawing/2014/main" id="{7D60AD58-04E8-4EFF-BC9A-BB85713680D7}"/>
+                <a16:creationId xmlns:a16="http://schemas.microsoft.com/office/drawing/2014/main" id="{D9FE6B58-6280-4934-8554-BD4BE71245B7}"/>
               </a:ext>
             </a:extLst>
           </p:cNvPr>
@@ -4833,7 +4833,7 @@
           <p:cNvPr id="4" name="disclosure">
             <a:extLst xmlns:a="http://schemas.openxmlformats.org/drawingml/2006/main">
               <a:ext uri="{FF2B5EF4-FFF2-40B4-BE49-F238E27FC236}">
-                <a16:creationId xmlns:a16="http://schemas.microsoft.com/office/drawing/2014/main" id="{82412673-7661-4547-B085-4D5A83971640}"/>
+                <a16:creationId xmlns:a16="http://schemas.microsoft.com/office/drawing/2014/main" id="{EFAEFD22-472B-42D7-B64A-1934B95B4650}"/>
               </a:ext>
             </a:extLst>
           </p:cNvPr>
@@ -4899,7 +4899,7 @@
           <p:cNvPr id="5" name="page">
             <a:extLst xmlns:a="http://schemas.openxmlformats.org/drawingml/2006/main">
               <a:ext uri="{FF2B5EF4-FFF2-40B4-BE49-F238E27FC236}">
-                <a16:creationId xmlns:a16="http://schemas.microsoft.com/office/drawing/2014/main" id="{3609CF63-A5D8-40EF-ACA2-88D536063A5D}"/>
+                <a16:creationId xmlns:a16="http://schemas.microsoft.com/office/drawing/2014/main" id="{582A51AE-7345-4E8F-B5CE-AF4BD83C6365}"/>
               </a:ext>
             </a:extLst>
           </p:cNvPr>
@@ -4963,7 +4963,7 @@
     </p:spTree>
     <p:extLst>
       <p:ext uri="{BB962C8B-B14F-4D97-AF65-F5344CB8AC3E}">
-        <p14:creationId xmlns:p14="http://schemas.microsoft.com/office/powerpoint/2010/main" val="2047178753"/>
+        <p14:creationId xmlns:p14="http://schemas.microsoft.com/office/powerpoint/2010/main" val="1569872146"/>
       </p:ext>
     </p:extLst>
   </p:cSld>
@@ -4994,7 +4994,7 @@
           <p:cNvPr id="6" name="title">
             <a:extLst xmlns:a="http://schemas.openxmlformats.org/drawingml/2006/main">
               <a:ext uri="{FF2B5EF4-FFF2-40B4-BE49-F238E27FC236}">
-                <a16:creationId xmlns:a16="http://schemas.microsoft.com/office/drawing/2014/main" id="{F9B96352-C0F4-4283-835A-8EC226E11FF3}"/>
+                <a16:creationId xmlns:a16="http://schemas.microsoft.com/office/drawing/2014/main" id="{35ED48DF-602C-4B33-9364-E780C22378AC}"/>
               </a:ext>
             </a:extLst>
           </p:cNvPr>
@@ -5060,7 +5060,7 @@
           <p:cNvPr id="2" name="paragraph-0">
             <a:extLst xmlns:a="http://schemas.openxmlformats.org/drawingml/2006/main">
               <a:ext uri="{FF2B5EF4-FFF2-40B4-BE49-F238E27FC236}">
-                <a16:creationId xmlns:a16="http://schemas.microsoft.com/office/drawing/2014/main" id="{9D37DA50-B8A4-4B68-A8AC-CC890EE244F9}"/>
+                <a16:creationId xmlns:a16="http://schemas.microsoft.com/office/drawing/2014/main" id="{446FF801-93E9-4A90-9343-E05FA81CBA0E}"/>
               </a:ext>
             </a:extLst>
           </p:cNvPr>
@@ -5126,7 +5126,7 @@
           <p:cNvPr id="3" name="paragraph-1">
             <a:extLst xmlns:a="http://schemas.openxmlformats.org/drawingml/2006/main">
               <a:ext uri="{FF2B5EF4-FFF2-40B4-BE49-F238E27FC236}">
-                <a16:creationId xmlns:a16="http://schemas.microsoft.com/office/drawing/2014/main" id="{57D80E83-2D28-4A00-A06C-0134F67C6FF8}"/>
+                <a16:creationId xmlns:a16="http://schemas.microsoft.com/office/drawing/2014/main" id="{CB348B84-8B36-4141-A8F7-2DD5C40CA6D7}"/>
               </a:ext>
             </a:extLst>
           </p:cNvPr>
@@ -5192,7 +5192,7 @@
           <p:cNvPr id="4" name="disclosure">
             <a:extLst xmlns:a="http://schemas.openxmlformats.org/drawingml/2006/main">
               <a:ext uri="{FF2B5EF4-FFF2-40B4-BE49-F238E27FC236}">
-                <a16:creationId xmlns:a16="http://schemas.microsoft.com/office/drawing/2014/main" id="{7CDA060F-8B60-4369-BBE2-525D6D40C340}"/>
+                <a16:creationId xmlns:a16="http://schemas.microsoft.com/office/drawing/2014/main" id="{A62CB7E9-2852-451D-84F3-298F5CC4A911}"/>
               </a:ext>
             </a:extLst>
           </p:cNvPr>
@@ -5258,7 +5258,7 @@
           <p:cNvPr id="5" name="page">
             <a:extLst xmlns:a="http://schemas.openxmlformats.org/drawingml/2006/main">
               <a:ext uri="{FF2B5EF4-FFF2-40B4-BE49-F238E27FC236}">
-                <a16:creationId xmlns:a16="http://schemas.microsoft.com/office/drawing/2014/main" id="{DC83808F-D25E-4579-BC10-5BE4BD4C4E7C}"/>
+                <a16:creationId xmlns:a16="http://schemas.microsoft.com/office/drawing/2014/main" id="{AD1B9CB3-9818-4B40-B819-108317C94A06}"/>
               </a:ext>
             </a:extLst>
           </p:cNvPr>
@@ -5322,7 +5322,7 @@
     </p:spTree>
     <p:extLst>
       <p:ext uri="{BB962C8B-B14F-4D97-AF65-F5344CB8AC3E}">
-        <p14:creationId xmlns:p14="http://schemas.microsoft.com/office/powerpoint/2010/main" val="1614887490"/>
+        <p14:creationId xmlns:p14="http://schemas.microsoft.com/office/powerpoint/2010/main" val="1421739889"/>
       </p:ext>
     </p:extLst>
   </p:cSld>
@@ -5353,7 +5353,7 @@
           <p:cNvPr id="6" name="title">
             <a:extLst xmlns:a="http://schemas.openxmlformats.org/drawingml/2006/main">
               <a:ext uri="{FF2B5EF4-FFF2-40B4-BE49-F238E27FC236}">
-                <a16:creationId xmlns:a16="http://schemas.microsoft.com/office/drawing/2014/main" id="{D8B7C720-DD59-4929-AFD3-01F479972632}"/>
+                <a16:creationId xmlns:a16="http://schemas.microsoft.com/office/drawing/2014/main" id="{528340A2-F375-4031-B953-16ACDD839AAB}"/>
               </a:ext>
             </a:extLst>
           </p:cNvPr>
@@ -5419,7 +5419,7 @@
           <p:cNvPr id="2" name="paragraph-0">
             <a:extLst xmlns:a="http://schemas.openxmlformats.org/drawingml/2006/main">
               <a:ext uri="{FF2B5EF4-FFF2-40B4-BE49-F238E27FC236}">
-                <a16:creationId xmlns:a16="http://schemas.microsoft.com/office/drawing/2014/main" id="{94AE524C-C7B0-4C1C-95AD-5555D80736A9}"/>
+                <a16:creationId xmlns:a16="http://schemas.microsoft.com/office/drawing/2014/main" id="{C6149EDD-CD56-4832-B737-4AC8E44B9E04}"/>
               </a:ext>
             </a:extLst>
           </p:cNvPr>
@@ -5485,7 +5485,7 @@
           <p:cNvPr id="3" name="paragraph-1">
             <a:extLst xmlns:a="http://schemas.openxmlformats.org/drawingml/2006/main">
               <a:ext uri="{FF2B5EF4-FFF2-40B4-BE49-F238E27FC236}">
-                <a16:creationId xmlns:a16="http://schemas.microsoft.com/office/drawing/2014/main" id="{9C97CB9C-7F02-4E30-B8EF-F0808026D57B}"/>
+                <a16:creationId xmlns:a16="http://schemas.microsoft.com/office/drawing/2014/main" id="{62ED523E-4D53-4B33-8446-9CB687030DFD}"/>
               </a:ext>
             </a:extLst>
           </p:cNvPr>
@@ -5551,7 +5551,7 @@
           <p:cNvPr id="4" name="disclosure">
             <a:extLst xmlns:a="http://schemas.openxmlformats.org/drawingml/2006/main">
               <a:ext uri="{FF2B5EF4-FFF2-40B4-BE49-F238E27FC236}">
-                <a16:creationId xmlns:a16="http://schemas.microsoft.com/office/drawing/2014/main" id="{EEB1246F-B128-4D46-BD87-DDFC6EDE14FB}"/>
+                <a16:creationId xmlns:a16="http://schemas.microsoft.com/office/drawing/2014/main" id="{0AE682DD-4DB9-4010-AE64-776996B0BC49}"/>
               </a:ext>
             </a:extLst>
           </p:cNvPr>
@@ -5617,7 +5617,7 @@
           <p:cNvPr id="5" name="page">
             <a:extLst xmlns:a="http://schemas.openxmlformats.org/drawingml/2006/main">
               <a:ext uri="{FF2B5EF4-FFF2-40B4-BE49-F238E27FC236}">
-                <a16:creationId xmlns:a16="http://schemas.microsoft.com/office/drawing/2014/main" id="{AEA717C5-70BB-4065-B0CF-A354688695CD}"/>
+                <a16:creationId xmlns:a16="http://schemas.microsoft.com/office/drawing/2014/main" id="{673D855F-A10A-4080-9EA9-7EDE3244A17C}"/>
               </a:ext>
             </a:extLst>
           </p:cNvPr>
@@ -5681,7 +5681,7 @@
     </p:spTree>
     <p:extLst>
       <p:ext uri="{BB962C8B-B14F-4D97-AF65-F5344CB8AC3E}">
-        <p14:creationId xmlns:p14="http://schemas.microsoft.com/office/powerpoint/2010/main" val="223565753"/>
+        <p14:creationId xmlns:p14="http://schemas.microsoft.com/office/powerpoint/2010/main" val="462008062"/>
       </p:ext>
     </p:extLst>
   </p:cSld>
@@ -5712,7 +5712,7 @@
           <p:cNvPr id="6" name="title">
             <a:extLst xmlns:a="http://schemas.openxmlformats.org/drawingml/2006/main">
               <a:ext uri="{FF2B5EF4-FFF2-40B4-BE49-F238E27FC236}">
-                <a16:creationId xmlns:a16="http://schemas.microsoft.com/office/drawing/2014/main" id="{951BC0CC-0C96-411A-B4F1-20B3C21465FF}"/>
+                <a16:creationId xmlns:a16="http://schemas.microsoft.com/office/drawing/2014/main" id="{E48ECCFA-29CC-40D7-9542-AD2515F3E92B}"/>
               </a:ext>
             </a:extLst>
           </p:cNvPr>
@@ -5778,7 +5778,7 @@
           <p:cNvPr id="2" name="paragraph-0">
             <a:extLst xmlns:a="http://schemas.openxmlformats.org/drawingml/2006/main">
               <a:ext uri="{FF2B5EF4-FFF2-40B4-BE49-F238E27FC236}">
-                <a16:creationId xmlns:a16="http://schemas.microsoft.com/office/drawing/2014/main" id="{0B9063A7-EE74-4430-8B1C-74D67F8FBD2E}"/>
+                <a16:creationId xmlns:a16="http://schemas.microsoft.com/office/drawing/2014/main" id="{263B192C-5AA4-440F-ACD7-1EE21040BFD8}"/>
               </a:ext>
             </a:extLst>
           </p:cNvPr>
@@ -5844,7 +5844,7 @@
           <p:cNvPr id="3" name="paragraph-1">
             <a:extLst xmlns:a="http://schemas.openxmlformats.org/drawingml/2006/main">
               <a:ext uri="{FF2B5EF4-FFF2-40B4-BE49-F238E27FC236}">
-                <a16:creationId xmlns:a16="http://schemas.microsoft.com/office/drawing/2014/main" id="{EC02ECC5-70B0-4E63-A218-B361BE8BB4B3}"/>
+                <a16:creationId xmlns:a16="http://schemas.microsoft.com/office/drawing/2014/main" id="{252D9BD0-AAB3-45AC-8CC5-67336CCD8858}"/>
               </a:ext>
             </a:extLst>
           </p:cNvPr>
@@ -5910,7 +5910,7 @@
           <p:cNvPr id="4" name="disclosure">
             <a:extLst xmlns:a="http://schemas.openxmlformats.org/drawingml/2006/main">
               <a:ext uri="{FF2B5EF4-FFF2-40B4-BE49-F238E27FC236}">
-                <a16:creationId xmlns:a16="http://schemas.microsoft.com/office/drawing/2014/main" id="{8CD71DD6-6B50-44C5-8081-77C0B857DFCB}"/>
+                <a16:creationId xmlns:a16="http://schemas.microsoft.com/office/drawing/2014/main" id="{AA743925-D72A-4FF9-8F3E-AD0BD6791D68}"/>
               </a:ext>
             </a:extLst>
           </p:cNvPr>
@@ -5976,7 +5976,7 @@
           <p:cNvPr id="5" name="page">
             <a:extLst xmlns:a="http://schemas.openxmlformats.org/drawingml/2006/main">
               <a:ext uri="{FF2B5EF4-FFF2-40B4-BE49-F238E27FC236}">
-                <a16:creationId xmlns:a16="http://schemas.microsoft.com/office/drawing/2014/main" id="{4E278715-88D4-4839-B12F-F72D419ED859}"/>
+                <a16:creationId xmlns:a16="http://schemas.microsoft.com/office/drawing/2014/main" id="{E0A8912B-72E4-4214-AA03-1AD1B442FC38}"/>
               </a:ext>
             </a:extLst>
           </p:cNvPr>
@@ -6040,7 +6040,7 @@
     </p:spTree>
     <p:extLst>
       <p:ext uri="{BB962C8B-B14F-4D97-AF65-F5344CB8AC3E}">
-        <p14:creationId xmlns:p14="http://schemas.microsoft.com/office/powerpoint/2010/main" val="1368252280"/>
+        <p14:creationId xmlns:p14="http://schemas.microsoft.com/office/powerpoint/2010/main" val="116861075"/>
       </p:ext>
     </p:extLst>
   </p:cSld>
@@ -6071,7 +6071,7 @@
           <p:cNvPr id="5" name="title">
             <a:extLst xmlns:a="http://schemas.openxmlformats.org/drawingml/2006/main">
               <a:ext uri="{FF2B5EF4-FFF2-40B4-BE49-F238E27FC236}">
-                <a16:creationId xmlns:a16="http://schemas.microsoft.com/office/drawing/2014/main" id="{93FC22D6-A8A7-46BC-A84D-DE4C1D138C69}"/>
+                <a16:creationId xmlns:a16="http://schemas.microsoft.com/office/drawing/2014/main" id="{6866F7DF-DAE4-4B13-BED4-E3F4E8A2EB25}"/>
               </a:ext>
             </a:extLst>
           </p:cNvPr>
@@ -6137,7 +6137,7 @@
           <p:cNvPr id="2" name="">
             <a:extLst xmlns:a="http://schemas.openxmlformats.org/drawingml/2006/main">
               <a:ext uri="{FF2B5EF4-FFF2-40B4-BE49-F238E27FC236}">
-                <a16:creationId xmlns:a16="http://schemas.microsoft.com/office/drawing/2014/main" id="{284EFF05-57E3-4C4A-9A0D-2B3AD16EDE18}"/>
+                <a16:creationId xmlns:a16="http://schemas.microsoft.com/office/drawing/2014/main" id="{9A6A5041-E135-407D-AC33-FC8EC019828C}"/>
               </a:ext>
             </a:extLst>
           </p:cNvPr>
@@ -6365,7 +6365,7 @@
           <p:cNvPr id="3" name="disclosure">
             <a:extLst xmlns:a="http://schemas.openxmlformats.org/drawingml/2006/main">
               <a:ext uri="{FF2B5EF4-FFF2-40B4-BE49-F238E27FC236}">
-                <a16:creationId xmlns:a16="http://schemas.microsoft.com/office/drawing/2014/main" id="{696C70CF-DD94-4AA5-B165-D0FBF532AD5F}"/>
+                <a16:creationId xmlns:a16="http://schemas.microsoft.com/office/drawing/2014/main" id="{039A56E7-A703-4890-9AF7-B891F079DA73}"/>
               </a:ext>
             </a:extLst>
           </p:cNvPr>
@@ -6431,7 +6431,7 @@
           <p:cNvPr id="4" name="page">
             <a:extLst xmlns:a="http://schemas.openxmlformats.org/drawingml/2006/main">
               <a:ext uri="{FF2B5EF4-FFF2-40B4-BE49-F238E27FC236}">
-                <a16:creationId xmlns:a16="http://schemas.microsoft.com/office/drawing/2014/main" id="{B7E6D1A2-3305-4174-9CE0-0F0F5F44C6B7}"/>
+                <a16:creationId xmlns:a16="http://schemas.microsoft.com/office/drawing/2014/main" id="{53A711C2-B407-45E0-8876-DB70B5207706}"/>
               </a:ext>
             </a:extLst>
           </p:cNvPr>
@@ -6495,7 +6495,7 @@
     </p:spTree>
     <p:extLst>
       <p:ext uri="{BB962C8B-B14F-4D97-AF65-F5344CB8AC3E}">
-        <p14:creationId xmlns:p14="http://schemas.microsoft.com/office/powerpoint/2010/main" val="937018581"/>
+        <p14:creationId xmlns:p14="http://schemas.microsoft.com/office/powerpoint/2010/main" val="1476663690"/>
       </p:ext>
     </p:extLst>
   </p:cSld>
@@ -6526,7 +6526,7 @@
           <p:cNvPr id="5" name="title">
             <a:extLst xmlns:a="http://schemas.openxmlformats.org/drawingml/2006/main">
               <a:ext uri="{FF2B5EF4-FFF2-40B4-BE49-F238E27FC236}">
-                <a16:creationId xmlns:a16="http://schemas.microsoft.com/office/drawing/2014/main" id="{4248FB0D-5D9F-42AA-8C13-D95C127C5D96}"/>
+                <a16:creationId xmlns:a16="http://schemas.microsoft.com/office/drawing/2014/main" id="{E05B10CE-6412-41D6-80E9-A62E46CDD2BF}"/>
               </a:ext>
             </a:extLst>
           </p:cNvPr>
@@ -6592,7 +6592,7 @@
           <p:cNvPr id="2" name="">
             <a:extLst xmlns:a="http://schemas.openxmlformats.org/drawingml/2006/main">
               <a:ext uri="{FF2B5EF4-FFF2-40B4-BE49-F238E27FC236}">
-                <a16:creationId xmlns:a16="http://schemas.microsoft.com/office/drawing/2014/main" id="{F0B3C9CF-6422-4781-B7C1-E4713640C542}"/>
+                <a16:creationId xmlns:a16="http://schemas.microsoft.com/office/drawing/2014/main" id="{2F1596B7-DAC9-4EF1-926C-A442C19B4A63}"/>
               </a:ext>
             </a:extLst>
           </p:cNvPr>
@@ -6820,7 +6820,7 @@
           <p:cNvPr id="3" name="disclosure">
             <a:extLst xmlns:a="http://schemas.openxmlformats.org/drawingml/2006/main">
               <a:ext uri="{FF2B5EF4-FFF2-40B4-BE49-F238E27FC236}">
-                <a16:creationId xmlns:a16="http://schemas.microsoft.com/office/drawing/2014/main" id="{299260D2-0503-4889-A86A-0F257613EEAE}"/>
+                <a16:creationId xmlns:a16="http://schemas.microsoft.com/office/drawing/2014/main" id="{1FCD577C-B437-451C-829E-2FE573A932AF}"/>
               </a:ext>
             </a:extLst>
           </p:cNvPr>
@@ -6886,7 +6886,7 @@
           <p:cNvPr id="4" name="page">
             <a:extLst xmlns:a="http://schemas.openxmlformats.org/drawingml/2006/main">
               <a:ext uri="{FF2B5EF4-FFF2-40B4-BE49-F238E27FC236}">
-                <a16:creationId xmlns:a16="http://schemas.microsoft.com/office/drawing/2014/main" id="{2EC4AB43-C953-490F-9622-668B5EAF5A1B}"/>
+                <a16:creationId xmlns:a16="http://schemas.microsoft.com/office/drawing/2014/main" id="{45244E5E-6E14-450F-8374-CDA9ACC688D3}"/>
               </a:ext>
             </a:extLst>
           </p:cNvPr>
@@ -6950,7 +6950,7 @@
     </p:spTree>
     <p:extLst>
       <p:ext uri="{BB962C8B-B14F-4D97-AF65-F5344CB8AC3E}">
-        <p14:creationId xmlns:p14="http://schemas.microsoft.com/office/powerpoint/2010/main" val="1191613506"/>
+        <p14:creationId xmlns:p14="http://schemas.microsoft.com/office/powerpoint/2010/main" val="1310340897"/>
       </p:ext>
     </p:extLst>
   </p:cSld>
@@ -6981,7 +6981,7 @@
           <p:cNvPr id="8" name="title">
             <a:extLst xmlns:a="http://schemas.openxmlformats.org/drawingml/2006/main">
               <a:ext uri="{FF2B5EF4-FFF2-40B4-BE49-F238E27FC236}">
-                <a16:creationId xmlns:a16="http://schemas.microsoft.com/office/drawing/2014/main" id="{08B310BD-C061-44C9-800B-44B40A362176}"/>
+                <a16:creationId xmlns:a16="http://schemas.microsoft.com/office/drawing/2014/main" id="{D8A56D60-D50C-494D-BB44-055528ED5E64}"/>
               </a:ext>
             </a:extLst>
           </p:cNvPr>
@@ -7047,7 +7047,7 @@
           <p:cNvPr id="2" name="paragraph-0">
             <a:extLst xmlns:a="http://schemas.openxmlformats.org/drawingml/2006/main">
               <a:ext uri="{FF2B5EF4-FFF2-40B4-BE49-F238E27FC236}">
-                <a16:creationId xmlns:a16="http://schemas.microsoft.com/office/drawing/2014/main" id="{D60C85B2-D8F8-4866-9D15-F38F6C9C7AF7}"/>
+                <a16:creationId xmlns:a16="http://schemas.microsoft.com/office/drawing/2014/main" id="{872DC22A-C3D2-4E68-B337-AAB4ECFE722C}"/>
               </a:ext>
             </a:extLst>
           </p:cNvPr>
@@ -7113,7 +7113,7 @@
           <p:cNvPr id="3" name="paragraph-1">
             <a:extLst xmlns:a="http://schemas.openxmlformats.org/drawingml/2006/main">
               <a:ext uri="{FF2B5EF4-FFF2-40B4-BE49-F238E27FC236}">
-                <a16:creationId xmlns:a16="http://schemas.microsoft.com/office/drawing/2014/main" id="{A758B352-BAAB-46D8-A618-611AB62194BA}"/>
+                <a16:creationId xmlns:a16="http://schemas.microsoft.com/office/drawing/2014/main" id="{7F2A4502-0871-4828-901C-7172975C5371}"/>
               </a:ext>
             </a:extLst>
           </p:cNvPr>
@@ -7179,7 +7179,7 @@
           <p:cNvPr id="4" name="">
             <a:extLst xmlns:a="http://schemas.openxmlformats.org/drawingml/2006/main">
               <a:ext uri="{FF2B5EF4-FFF2-40B4-BE49-F238E27FC236}">
-                <a16:creationId xmlns:a16="http://schemas.microsoft.com/office/drawing/2014/main" id="{4F861D5E-6C49-49DA-891F-4781978B20AA}"/>
+                <a16:creationId xmlns:a16="http://schemas.microsoft.com/office/drawing/2014/main" id="{2DD498EA-BE81-4A95-83E7-23891C68A872}"/>
               </a:ext>
             </a:extLst>
           </p:cNvPr>
@@ -7189,7 +7189,7 @@
           <p:nvPr/>
         </p:nvPicPr>
         <p:blipFill>
-          <a:blip xmlns:r="http://schemas.openxmlformats.org/officeDocument/2006/relationships" xmlns:a="http://schemas.openxmlformats.org/drawingml/2006/main" r:embed="Rb312e30a7d634d14"/>
+          <a:blip xmlns:r="http://schemas.openxmlformats.org/officeDocument/2006/relationships" xmlns:a="http://schemas.openxmlformats.org/drawingml/2006/main" r:embed="R370e9f1b6e584fe9"/>
           <a:stretch xmlns:a="http://schemas.openxmlformats.org/drawingml/2006/main"/>
         </p:blipFill>
         <p:spPr>
@@ -7207,7 +7207,7 @@
           <p:cNvPr id="5" name="image-provenance">
             <a:extLst xmlns:a="http://schemas.openxmlformats.org/drawingml/2006/main">
               <a:ext uri="{FF2B5EF4-FFF2-40B4-BE49-F238E27FC236}">
-                <a16:creationId xmlns:a16="http://schemas.microsoft.com/office/drawing/2014/main" id="{3077D72F-7F72-480B-B8ED-C763A9145A23}"/>
+                <a16:creationId xmlns:a16="http://schemas.microsoft.com/office/drawing/2014/main" id="{AE551024-B114-4A73-9A11-26A690CD1CEC}"/>
               </a:ext>
             </a:extLst>
           </p:cNvPr>
@@ -7273,7 +7273,7 @@
           <p:cNvPr id="6" name="disclosure">
             <a:extLst xmlns:a="http://schemas.openxmlformats.org/drawingml/2006/main">
               <a:ext uri="{FF2B5EF4-FFF2-40B4-BE49-F238E27FC236}">
-                <a16:creationId xmlns:a16="http://schemas.microsoft.com/office/drawing/2014/main" id="{0EE6851B-098F-4F4D-8545-C1CA6677D350}"/>
+                <a16:creationId xmlns:a16="http://schemas.microsoft.com/office/drawing/2014/main" id="{9ADE1276-5681-4F2D-AD86-C38957BAC52A}"/>
               </a:ext>
             </a:extLst>
           </p:cNvPr>
@@ -7339,7 +7339,7 @@
           <p:cNvPr id="7" name="page">
             <a:extLst xmlns:a="http://schemas.openxmlformats.org/drawingml/2006/main">
               <a:ext uri="{FF2B5EF4-FFF2-40B4-BE49-F238E27FC236}">
-                <a16:creationId xmlns:a16="http://schemas.microsoft.com/office/drawing/2014/main" id="{316EB06E-F63D-41C2-A10E-40E6CBDD3957}"/>
+                <a16:creationId xmlns:a16="http://schemas.microsoft.com/office/drawing/2014/main" id="{37295473-7BC6-4B63-B239-E706FDE753D6}"/>
               </a:ext>
             </a:extLst>
           </p:cNvPr>
@@ -7403,7 +7403,7 @@
     </p:spTree>
     <p:extLst>
       <p:ext uri="{BB962C8B-B14F-4D97-AF65-F5344CB8AC3E}">
-        <p14:creationId xmlns:p14="http://schemas.microsoft.com/office/powerpoint/2010/main" val="1237130866"/>
+        <p14:creationId xmlns:p14="http://schemas.microsoft.com/office/powerpoint/2010/main" val="1318024880"/>
       </p:ext>
     </p:extLst>
   </p:cSld>
@@ -7434,7 +7434,7 @@
           <p:cNvPr id="6" name="title">
             <a:extLst xmlns:a="http://schemas.openxmlformats.org/drawingml/2006/main">
               <a:ext uri="{FF2B5EF4-FFF2-40B4-BE49-F238E27FC236}">
-                <a16:creationId xmlns:a16="http://schemas.microsoft.com/office/drawing/2014/main" id="{A59B60C5-FAD3-4E34-A84A-7E9FEC21F2E8}"/>
+                <a16:creationId xmlns:a16="http://schemas.microsoft.com/office/drawing/2014/main" id="{8FA899F6-BB40-43F7-82D3-35E8CA5CEF89}"/>
               </a:ext>
             </a:extLst>
           </p:cNvPr>
@@ -7500,7 +7500,7 @@
           <p:cNvPr id="2" name="paragraph-0">
             <a:extLst xmlns:a="http://schemas.openxmlformats.org/drawingml/2006/main">
               <a:ext uri="{FF2B5EF4-FFF2-40B4-BE49-F238E27FC236}">
-                <a16:creationId xmlns:a16="http://schemas.microsoft.com/office/drawing/2014/main" id="{ED909F35-4DBE-47C4-AEA3-B0ABA6FDC08F}"/>
+                <a16:creationId xmlns:a16="http://schemas.microsoft.com/office/drawing/2014/main" id="{BCBBC521-9AE6-4419-A0BD-C0679F1068A0}"/>
               </a:ext>
             </a:extLst>
           </p:cNvPr>
@@ -7566,7 +7566,7 @@
           <p:cNvPr id="3" name="paragraph-1">
             <a:extLst xmlns:a="http://schemas.openxmlformats.org/drawingml/2006/main">
               <a:ext uri="{FF2B5EF4-FFF2-40B4-BE49-F238E27FC236}">
-                <a16:creationId xmlns:a16="http://schemas.microsoft.com/office/drawing/2014/main" id="{133DC30D-32D3-4143-A535-DCCF486FD053}"/>
+                <a16:creationId xmlns:a16="http://schemas.microsoft.com/office/drawing/2014/main" id="{B2CECB71-BCFA-44B0-B0F6-7B224E3EA775}"/>
               </a:ext>
             </a:extLst>
           </p:cNvPr>
@@ -7632,7 +7632,7 @@
           <p:cNvPr id="4" name="disclosure">
             <a:extLst xmlns:a="http://schemas.openxmlformats.org/drawingml/2006/main">
               <a:ext uri="{FF2B5EF4-FFF2-40B4-BE49-F238E27FC236}">
-                <a16:creationId xmlns:a16="http://schemas.microsoft.com/office/drawing/2014/main" id="{6B518220-4787-4C14-8574-49BBCE9C2BD7}"/>
+                <a16:creationId xmlns:a16="http://schemas.microsoft.com/office/drawing/2014/main" id="{47C7697E-AC7B-4D8F-AF3D-2776C339B3EF}"/>
               </a:ext>
             </a:extLst>
           </p:cNvPr>
@@ -7698,7 +7698,7 @@
           <p:cNvPr id="5" name="page">
             <a:extLst xmlns:a="http://schemas.openxmlformats.org/drawingml/2006/main">
               <a:ext uri="{FF2B5EF4-FFF2-40B4-BE49-F238E27FC236}">
-                <a16:creationId xmlns:a16="http://schemas.microsoft.com/office/drawing/2014/main" id="{B14A47E1-4218-45D6-BA4F-475533EA97B0}"/>
+                <a16:creationId xmlns:a16="http://schemas.microsoft.com/office/drawing/2014/main" id="{F78C636D-C9E8-45AC-85B2-7E0AD083D284}"/>
               </a:ext>
             </a:extLst>
           </p:cNvPr>
@@ -7762,7 +7762,7 @@
     </p:spTree>
     <p:extLst>
       <p:ext uri="{BB962C8B-B14F-4D97-AF65-F5344CB8AC3E}">
-        <p14:creationId xmlns:p14="http://schemas.microsoft.com/office/powerpoint/2010/main" val="105413393"/>
+        <p14:creationId xmlns:p14="http://schemas.microsoft.com/office/powerpoint/2010/main" val="433841970"/>
       </p:ext>
     </p:extLst>
   </p:cSld>
@@ -7793,7 +7793,7 @@
           <p:cNvPr id="6" name="title">
             <a:extLst xmlns:a="http://schemas.openxmlformats.org/drawingml/2006/main">
               <a:ext uri="{FF2B5EF4-FFF2-40B4-BE49-F238E27FC236}">
-                <a16:creationId xmlns:a16="http://schemas.microsoft.com/office/drawing/2014/main" id="{F439347C-C098-48E5-912D-7F9256C921F0}"/>
+                <a16:creationId xmlns:a16="http://schemas.microsoft.com/office/drawing/2014/main" id="{8C6694F6-94E2-4A0E-9177-76A577EDCFDF}"/>
               </a:ext>
             </a:extLst>
           </p:cNvPr>
@@ -7859,7 +7859,7 @@
           <p:cNvPr id="2" name="paragraph-0">
             <a:extLst xmlns:a="http://schemas.openxmlformats.org/drawingml/2006/main">
               <a:ext uri="{FF2B5EF4-FFF2-40B4-BE49-F238E27FC236}">
-                <a16:creationId xmlns:a16="http://schemas.microsoft.com/office/drawing/2014/main" id="{5ADDA217-D831-4E00-8586-6388A3FA1182}"/>
+                <a16:creationId xmlns:a16="http://schemas.microsoft.com/office/drawing/2014/main" id="{019B366A-8A2A-4ED9-85CE-30A364906383}"/>
               </a:ext>
             </a:extLst>
           </p:cNvPr>
@@ -7925,7 +7925,7 @@
           <p:cNvPr id="3" name="paragraph-1">
             <a:extLst xmlns:a="http://schemas.openxmlformats.org/drawingml/2006/main">
               <a:ext uri="{FF2B5EF4-FFF2-40B4-BE49-F238E27FC236}">
-                <a16:creationId xmlns:a16="http://schemas.microsoft.com/office/drawing/2014/main" id="{5683C92F-1BEC-4F8A-8E8E-8C91EE921553}"/>
+                <a16:creationId xmlns:a16="http://schemas.microsoft.com/office/drawing/2014/main" id="{0BE1A033-4DA1-4453-8D15-5C4A3BF75EDE}"/>
               </a:ext>
             </a:extLst>
           </p:cNvPr>
@@ -7991,7 +7991,7 @@
           <p:cNvPr id="4" name="disclosure">
             <a:extLst xmlns:a="http://schemas.openxmlformats.org/drawingml/2006/main">
               <a:ext uri="{FF2B5EF4-FFF2-40B4-BE49-F238E27FC236}">
-                <a16:creationId xmlns:a16="http://schemas.microsoft.com/office/drawing/2014/main" id="{2DD2217E-609B-458C-86AD-80364842F01A}"/>
+                <a16:creationId xmlns:a16="http://schemas.microsoft.com/office/drawing/2014/main" id="{C6919555-FAD9-4F38-B759-C441D0F1BCE1}"/>
               </a:ext>
             </a:extLst>
           </p:cNvPr>
@@ -8057,7 +8057,7 @@
           <p:cNvPr id="5" name="page">
             <a:extLst xmlns:a="http://schemas.openxmlformats.org/drawingml/2006/main">
               <a:ext uri="{FF2B5EF4-FFF2-40B4-BE49-F238E27FC236}">
-                <a16:creationId xmlns:a16="http://schemas.microsoft.com/office/drawing/2014/main" id="{952DA80B-8890-4E2B-9AEB-9DC1BE2BD868}"/>
+                <a16:creationId xmlns:a16="http://schemas.microsoft.com/office/drawing/2014/main" id="{0728EB65-7CCC-4E94-9638-F4EC4038BB8E}"/>
               </a:ext>
             </a:extLst>
           </p:cNvPr>
@@ -8121,7 +8121,7 @@
     </p:spTree>
     <p:extLst>
       <p:ext uri="{BB962C8B-B14F-4D97-AF65-F5344CB8AC3E}">
-        <p14:creationId xmlns:p14="http://schemas.microsoft.com/office/powerpoint/2010/main" val="1274276615"/>
+        <p14:creationId xmlns:p14="http://schemas.microsoft.com/office/powerpoint/2010/main" val="1070094544"/>
       </p:ext>
     </p:extLst>
   </p:cSld>
